--- a/기획서/현재 플로우 직관성 + 맵 제작.pptx
+++ b/기획서/현재 플로우 직관성 + 맵 제작.pptx
@@ -15,7 +15,9 @@
     <p:sldId id="267" r:id="rId9"/>
     <p:sldId id="263" r:id="rId10"/>
     <p:sldId id="265" r:id="rId11"/>
-    <p:sldId id="268" r:id="rId12"/>
+    <p:sldId id="269" r:id="rId12"/>
+    <p:sldId id="270" r:id="rId13"/>
+    <p:sldId id="268" r:id="rId14"/>
   </p:sldIdLst>
   <p:sldSz cx="12192000" cy="6858000"/>
   <p:notesSz cx="6858000" cy="9144000"/>
@@ -269,7 +271,7 @@
           <a:p>
             <a:fld id="{A14A861B-BBF0-4E9D-83EB-CA452E10C33B}" type="datetimeFigureOut">
               <a:rPr lang="ko-KR" altLang="en-US" smtClean="0"/>
-              <a:t>2026-01-05</a:t>
+              <a:t>2026-03-07</a:t>
             </a:fld>
             <a:endParaRPr lang="ko-KR" altLang="en-US"/>
           </a:p>
@@ -467,7 +469,7 @@
           <a:p>
             <a:fld id="{A14A861B-BBF0-4E9D-83EB-CA452E10C33B}" type="datetimeFigureOut">
               <a:rPr lang="ko-KR" altLang="en-US" smtClean="0"/>
-              <a:t>2026-01-05</a:t>
+              <a:t>2026-03-07</a:t>
             </a:fld>
             <a:endParaRPr lang="ko-KR" altLang="en-US"/>
           </a:p>
@@ -675,7 +677,7 @@
           <a:p>
             <a:fld id="{A14A861B-BBF0-4E9D-83EB-CA452E10C33B}" type="datetimeFigureOut">
               <a:rPr lang="ko-KR" altLang="en-US" smtClean="0"/>
-              <a:t>2026-01-05</a:t>
+              <a:t>2026-03-07</a:t>
             </a:fld>
             <a:endParaRPr lang="ko-KR" altLang="en-US"/>
           </a:p>
@@ -873,7 +875,7 @@
           <a:p>
             <a:fld id="{A14A861B-BBF0-4E9D-83EB-CA452E10C33B}" type="datetimeFigureOut">
               <a:rPr lang="ko-KR" altLang="en-US" smtClean="0"/>
-              <a:t>2026-01-05</a:t>
+              <a:t>2026-03-07</a:t>
             </a:fld>
             <a:endParaRPr lang="ko-KR" altLang="en-US"/>
           </a:p>
@@ -1148,7 +1150,7 @@
           <a:p>
             <a:fld id="{A14A861B-BBF0-4E9D-83EB-CA452E10C33B}" type="datetimeFigureOut">
               <a:rPr lang="ko-KR" altLang="en-US" smtClean="0"/>
-              <a:t>2026-01-05</a:t>
+              <a:t>2026-03-07</a:t>
             </a:fld>
             <a:endParaRPr lang="ko-KR" altLang="en-US"/>
           </a:p>
@@ -1413,7 +1415,7 @@
           <a:p>
             <a:fld id="{A14A861B-BBF0-4E9D-83EB-CA452E10C33B}" type="datetimeFigureOut">
               <a:rPr lang="ko-KR" altLang="en-US" smtClean="0"/>
-              <a:t>2026-01-05</a:t>
+              <a:t>2026-03-07</a:t>
             </a:fld>
             <a:endParaRPr lang="ko-KR" altLang="en-US"/>
           </a:p>
@@ -1825,7 +1827,7 @@
           <a:p>
             <a:fld id="{A14A861B-BBF0-4E9D-83EB-CA452E10C33B}" type="datetimeFigureOut">
               <a:rPr lang="ko-KR" altLang="en-US" smtClean="0"/>
-              <a:t>2026-01-05</a:t>
+              <a:t>2026-03-07</a:t>
             </a:fld>
             <a:endParaRPr lang="ko-KR" altLang="en-US"/>
           </a:p>
@@ -1966,7 +1968,7 @@
           <a:p>
             <a:fld id="{A14A861B-BBF0-4E9D-83EB-CA452E10C33B}" type="datetimeFigureOut">
               <a:rPr lang="ko-KR" altLang="en-US" smtClean="0"/>
-              <a:t>2026-01-05</a:t>
+              <a:t>2026-03-07</a:t>
             </a:fld>
             <a:endParaRPr lang="ko-KR" altLang="en-US"/>
           </a:p>
@@ -2079,7 +2081,7 @@
           <a:p>
             <a:fld id="{A14A861B-BBF0-4E9D-83EB-CA452E10C33B}" type="datetimeFigureOut">
               <a:rPr lang="ko-KR" altLang="en-US" smtClean="0"/>
-              <a:t>2026-01-05</a:t>
+              <a:t>2026-03-07</a:t>
             </a:fld>
             <a:endParaRPr lang="ko-KR" altLang="en-US"/>
           </a:p>
@@ -2390,7 +2392,7 @@
           <a:p>
             <a:fld id="{A14A861B-BBF0-4E9D-83EB-CA452E10C33B}" type="datetimeFigureOut">
               <a:rPr lang="ko-KR" altLang="en-US" smtClean="0"/>
-              <a:t>2026-01-05</a:t>
+              <a:t>2026-03-07</a:t>
             </a:fld>
             <a:endParaRPr lang="ko-KR" altLang="en-US"/>
           </a:p>
@@ -2678,7 +2680,7 @@
           <a:p>
             <a:fld id="{A14A861B-BBF0-4E9D-83EB-CA452E10C33B}" type="datetimeFigureOut">
               <a:rPr lang="ko-KR" altLang="en-US" smtClean="0"/>
-              <a:t>2026-01-05</a:t>
+              <a:t>2026-03-07</a:t>
             </a:fld>
             <a:endParaRPr lang="ko-KR" altLang="en-US"/>
           </a:p>
@@ -2919,7 +2921,7 @@
           <a:p>
             <a:fld id="{A14A861B-BBF0-4E9D-83EB-CA452E10C33B}" type="datetimeFigureOut">
               <a:rPr lang="ko-KR" altLang="en-US" smtClean="0"/>
-              <a:t>2026-01-05</a:t>
+              <a:t>2026-03-07</a:t>
             </a:fld>
             <a:endParaRPr lang="ko-KR" altLang="en-US"/>
           </a:p>
@@ -3782,6 +3784,722 @@
           <p:cNvPr id="2" name="제목 1">
             <a:extLst>
               <a:ext uri="{FF2B5EF4-FFF2-40B4-BE49-F238E27FC236}">
+                <a16:creationId xmlns:a16="http://schemas.microsoft.com/office/drawing/2014/main" id="{F85E0F81-05E7-4E48-8D3F-783FC5C89271}"/>
+              </a:ext>
+            </a:extLst>
+          </p:cNvPr>
+          <p:cNvSpPr>
+            <a:spLocks noGrp="1"/>
+          </p:cNvSpPr>
+          <p:nvPr>
+            <p:ph type="title"/>
+          </p:nvPr>
+        </p:nvSpPr>
+        <p:spPr>
+          <a:xfrm>
+            <a:off x="838200" y="365125"/>
+            <a:ext cx="9673424" cy="501567"/>
+          </a:xfrm>
+        </p:spPr>
+        <p:txBody>
+          <a:bodyPr>
+            <a:normAutofit/>
+          </a:bodyPr>
+          <a:lstStyle/>
+          <a:p>
+            <a:r>
+              <a:rPr lang="ko-KR" altLang="en-US" sz="2000" dirty="0"/>
+              <a:t>복도 </a:t>
+            </a:r>
+            <a:r>
+              <a:rPr lang="ko-KR" altLang="en-US" sz="2000" dirty="0" err="1"/>
+              <a:t>기믹</a:t>
+            </a:r>
+            <a:r>
+              <a:rPr lang="ko-KR" altLang="en-US" sz="2000" dirty="0"/>
+              <a:t> 추가</a:t>
+            </a:r>
+            <a:r>
+              <a:rPr lang="en-US" altLang="ko-KR" sz="2000" dirty="0"/>
+              <a:t>(</a:t>
+            </a:r>
+            <a:r>
+              <a:rPr lang="ko-KR" altLang="en-US" sz="2000" dirty="0"/>
+              <a:t>적을 추가하여 긴장감</a:t>
+            </a:r>
+            <a:r>
+              <a:rPr lang="en-US" altLang="ko-KR" sz="2000" dirty="0"/>
+              <a:t>, </a:t>
+            </a:r>
+            <a:r>
+              <a:rPr lang="ko-KR" altLang="en-US" sz="2000" dirty="0"/>
+              <a:t>공포 분위기 추가</a:t>
+            </a:r>
+            <a:r>
+              <a:rPr lang="en-US" altLang="ko-KR" sz="2000" dirty="0"/>
+              <a:t>)</a:t>
+            </a:r>
+            <a:r>
+              <a:rPr lang="ko-KR" altLang="en-US" sz="2000" dirty="0"/>
+              <a:t> </a:t>
+            </a:r>
+          </a:p>
+        </p:txBody>
+      </p:sp>
+      <p:sp>
+        <p:nvSpPr>
+          <p:cNvPr id="5" name="TextBox 4">
+            <a:extLst>
+              <a:ext uri="{FF2B5EF4-FFF2-40B4-BE49-F238E27FC236}">
+                <a16:creationId xmlns:a16="http://schemas.microsoft.com/office/drawing/2014/main" id="{7ABB3EE8-1B1E-4DBB-B8F0-97C69DD590C1}"/>
+              </a:ext>
+            </a:extLst>
+          </p:cNvPr>
+          <p:cNvSpPr txBox="1"/>
+          <p:nvPr/>
+        </p:nvSpPr>
+        <p:spPr>
+          <a:xfrm>
+            <a:off x="779228" y="1226287"/>
+            <a:ext cx="5955527" cy="369332"/>
+          </a:xfrm>
+          <a:prstGeom prst="rect">
+            <a:avLst/>
+          </a:prstGeom>
+          <a:noFill/>
+        </p:spPr>
+        <p:txBody>
+          <a:bodyPr wrap="square" rtlCol="0">
+            <a:spAutoFit/>
+          </a:bodyPr>
+          <a:lstStyle/>
+          <a:p>
+            <a:pPr marL="285750" indent="-285750">
+              <a:buFont typeface="Arial" panose="020B0604020202020204" pitchFamily="34" charset="0"/>
+              <a:buChar char="•"/>
+            </a:pPr>
+            <a:r>
+              <a:rPr lang="ko-KR" altLang="en-US"/>
+              <a:t>매인 홀에 들어갔을 때</a:t>
+            </a:r>
+          </a:p>
+        </p:txBody>
+      </p:sp>
+      <p:pic>
+        <p:nvPicPr>
+          <p:cNvPr id="6" name="그림 5">
+            <a:extLst>
+              <a:ext uri="{FF2B5EF4-FFF2-40B4-BE49-F238E27FC236}">
+                <a16:creationId xmlns:a16="http://schemas.microsoft.com/office/drawing/2014/main" id="{C00A23EE-B157-4C59-9732-4351FDCDC909}"/>
+              </a:ext>
+            </a:extLst>
+          </p:cNvPr>
+          <p:cNvPicPr>
+            <a:picLocks noChangeAspect="1"/>
+          </p:cNvPicPr>
+          <p:nvPr/>
+        </p:nvPicPr>
+        <p:blipFill>
+          <a:blip r:embed="rId2"/>
+          <a:stretch>
+            <a:fillRect/>
+          </a:stretch>
+        </p:blipFill>
+        <p:spPr>
+          <a:xfrm>
+            <a:off x="838201" y="2392536"/>
+            <a:ext cx="4695908" cy="3173377"/>
+          </a:xfrm>
+          <a:prstGeom prst="rect">
+            <a:avLst/>
+          </a:prstGeom>
+        </p:spPr>
+      </p:pic>
+      <p:sp>
+        <p:nvSpPr>
+          <p:cNvPr id="7" name="액자 6">
+            <a:extLst>
+              <a:ext uri="{FF2B5EF4-FFF2-40B4-BE49-F238E27FC236}">
+                <a16:creationId xmlns:a16="http://schemas.microsoft.com/office/drawing/2014/main" id="{D86F8763-C96D-4AFB-855D-1E115CC25C4E}"/>
+              </a:ext>
+            </a:extLst>
+          </p:cNvPr>
+          <p:cNvSpPr/>
+          <p:nvPr/>
+        </p:nvSpPr>
+        <p:spPr>
+          <a:xfrm>
+            <a:off x="4492487" y="3538330"/>
+            <a:ext cx="492981" cy="1041621"/>
+          </a:xfrm>
+          <a:prstGeom prst="frame">
+            <a:avLst/>
+          </a:prstGeom>
+          <a:solidFill>
+            <a:srgbClr val="FF0000"/>
+          </a:solidFill>
+          <a:ln>
+            <a:solidFill>
+              <a:srgbClr val="FF0000"/>
+            </a:solidFill>
+          </a:ln>
+        </p:spPr>
+        <p:style>
+          <a:lnRef idx="2">
+            <a:schemeClr val="accent1">
+              <a:shade val="50000"/>
+            </a:schemeClr>
+          </a:lnRef>
+          <a:fillRef idx="1">
+            <a:schemeClr val="accent1"/>
+          </a:fillRef>
+          <a:effectRef idx="0">
+            <a:schemeClr val="accent1"/>
+          </a:effectRef>
+          <a:fontRef idx="minor">
+            <a:schemeClr val="lt1"/>
+          </a:fontRef>
+        </p:style>
+        <p:txBody>
+          <a:bodyPr rtlCol="0" anchor="ctr"/>
+          <a:lstStyle/>
+          <a:p>
+            <a:pPr algn="ctr"/>
+            <a:endParaRPr lang="ko-KR" altLang="en-US">
+              <a:solidFill>
+                <a:schemeClr val="tx1"/>
+              </a:solidFill>
+            </a:endParaRPr>
+          </a:p>
+        </p:txBody>
+      </p:sp>
+      <p:sp>
+        <p:nvSpPr>
+          <p:cNvPr id="8" name="TextBox 7">
+            <a:extLst>
+              <a:ext uri="{FF2B5EF4-FFF2-40B4-BE49-F238E27FC236}">
+                <a16:creationId xmlns:a16="http://schemas.microsoft.com/office/drawing/2014/main" id="{9832D293-0D34-4403-B510-EAECD8592E4F}"/>
+              </a:ext>
+            </a:extLst>
+          </p:cNvPr>
+          <p:cNvSpPr txBox="1"/>
+          <p:nvPr/>
+        </p:nvSpPr>
+        <p:spPr>
+          <a:xfrm>
+            <a:off x="6019137" y="2364705"/>
+            <a:ext cx="5334662" cy="3693319"/>
+          </a:xfrm>
+          <a:prstGeom prst="rect">
+            <a:avLst/>
+          </a:prstGeom>
+          <a:noFill/>
+        </p:spPr>
+        <p:txBody>
+          <a:bodyPr wrap="square" rtlCol="0">
+            <a:spAutoFit/>
+          </a:bodyPr>
+          <a:lstStyle/>
+          <a:p>
+            <a:r>
+              <a:rPr lang="en-US" altLang="ko-KR" dirty="0"/>
+              <a:t>-</a:t>
+            </a:r>
+            <a:r>
+              <a:rPr lang="ko-KR" altLang="en-US" dirty="0"/>
+              <a:t>붉은 네모 칸이 적의 위치</a:t>
+            </a:r>
+            <a:endParaRPr lang="en-US" altLang="ko-KR" dirty="0"/>
+          </a:p>
+          <a:p>
+            <a:endParaRPr lang="en-US" altLang="ko-KR" dirty="0"/>
+          </a:p>
+          <a:p>
+            <a:r>
+              <a:rPr lang="en-US" altLang="ko-KR" dirty="0"/>
+              <a:t>-</a:t>
+            </a:r>
+            <a:r>
+              <a:rPr lang="ko-KR" altLang="en-US" dirty="0"/>
+              <a:t>적 오브젝트에 캔버스를 씌워서 적 오브젝트 안에 패널을 넣음</a:t>
+            </a:r>
+            <a:endParaRPr lang="en-US" altLang="ko-KR" dirty="0"/>
+          </a:p>
+          <a:p>
+            <a:r>
+              <a:rPr lang="en-US" altLang="ko-KR" dirty="0"/>
+              <a:t>[</a:t>
+            </a:r>
+            <a:r>
+              <a:rPr lang="ko-KR" altLang="en-US" dirty="0"/>
+              <a:t>오브젝트 트리 구조</a:t>
+            </a:r>
+            <a:r>
+              <a:rPr lang="en-US" altLang="ko-KR" dirty="0"/>
+              <a:t>]</a:t>
+            </a:r>
+          </a:p>
+          <a:p>
+            <a:r>
+              <a:rPr lang="en-US" altLang="ko-KR" dirty="0"/>
+              <a:t>–ENEMY &lt;- CAPSULE COLLISION 2D(</a:t>
+            </a:r>
+            <a:r>
+              <a:rPr lang="ko-KR" altLang="en-US" dirty="0"/>
+              <a:t>있어야 함</a:t>
+            </a:r>
+            <a:r>
+              <a:rPr lang="en-US" altLang="ko-KR" dirty="0"/>
+              <a:t>) </a:t>
+            </a:r>
+          </a:p>
+          <a:p>
+            <a:r>
+              <a:rPr lang="en-US" altLang="ko-KR" dirty="0"/>
+              <a:t>   -PANEL</a:t>
+            </a:r>
+          </a:p>
+          <a:p>
+            <a:r>
+              <a:rPr lang="en-US" altLang="ko-KR" dirty="0"/>
+              <a:t>     -RAWIMAGE</a:t>
+            </a:r>
+          </a:p>
+          <a:p>
+            <a:endParaRPr lang="en-US" altLang="ko-KR" dirty="0"/>
+          </a:p>
+          <a:p>
+            <a:r>
+              <a:rPr lang="ko-KR" altLang="en-US" dirty="0"/>
+              <a:t>클릭 했을 때 플레이어의 모든 행동을 일시 정지</a:t>
+            </a:r>
+            <a:br>
+              <a:rPr lang="en-US" altLang="ko-KR" dirty="0"/>
+            </a:br>
+            <a:r>
+              <a:rPr lang="en-US" altLang="ko-KR" dirty="0"/>
+              <a:t>-</a:t>
+            </a:r>
+            <a:r>
+              <a:rPr lang="ko-KR" altLang="en-US" dirty="0"/>
+              <a:t>마우스 삭제 </a:t>
+            </a:r>
+            <a:endParaRPr lang="en-US" altLang="ko-KR" dirty="0"/>
+          </a:p>
+          <a:p>
+            <a:r>
+              <a:rPr lang="en-US" altLang="ko-KR" dirty="0"/>
+              <a:t>-</a:t>
+            </a:r>
+            <a:r>
+              <a:rPr lang="ko-KR" altLang="en-US" dirty="0"/>
+              <a:t>클릭</a:t>
+            </a:r>
+            <a:r>
+              <a:rPr lang="en-US" altLang="ko-KR" dirty="0"/>
+              <a:t>x</a:t>
+            </a:r>
+          </a:p>
+          <a:p>
+            <a:r>
+              <a:rPr lang="en-US" altLang="ko-KR" dirty="0"/>
+              <a:t>-ESC</a:t>
+            </a:r>
+            <a:r>
+              <a:rPr lang="ko-KR" altLang="en-US" dirty="0"/>
+              <a:t>금지</a:t>
+            </a:r>
+            <a:endParaRPr lang="en-US" altLang="ko-KR" dirty="0"/>
+          </a:p>
+        </p:txBody>
+      </p:sp>
+    </p:spTree>
+    <p:extLst>
+      <p:ext uri="{BB962C8B-B14F-4D97-AF65-F5344CB8AC3E}">
+        <p14:creationId xmlns:p14="http://schemas.microsoft.com/office/powerpoint/2010/main" val="31944589"/>
+      </p:ext>
+    </p:extLst>
+  </p:cSld>
+  <p:clrMapOvr>
+    <a:masterClrMapping/>
+  </p:clrMapOvr>
+</p:sld>
+</file>
+
+<file path=ppt/slides/slide12.xml><?xml version="1.0" encoding="utf-8"?>
+<p:sld xmlns:a="http://schemas.openxmlformats.org/drawingml/2006/main" xmlns:r="http://schemas.openxmlformats.org/officeDocument/2006/relationships" xmlns:p="http://schemas.openxmlformats.org/presentationml/2006/main">
+  <p:cSld>
+    <p:spTree>
+      <p:nvGrpSpPr>
+        <p:cNvPr id="1" name=""/>
+        <p:cNvGrpSpPr/>
+        <p:nvPr/>
+      </p:nvGrpSpPr>
+      <p:grpSpPr>
+        <a:xfrm>
+          <a:off x="0" y="0"/>
+          <a:ext cx="0" cy="0"/>
+          <a:chOff x="0" y="0"/>
+          <a:chExt cx="0" cy="0"/>
+        </a:xfrm>
+      </p:grpSpPr>
+      <p:sp>
+        <p:nvSpPr>
+          <p:cNvPr id="2" name="제목 1">
+            <a:extLst>
+              <a:ext uri="{FF2B5EF4-FFF2-40B4-BE49-F238E27FC236}">
+                <a16:creationId xmlns:a16="http://schemas.microsoft.com/office/drawing/2014/main" id="{F85E0F81-05E7-4E48-8D3F-783FC5C89271}"/>
+              </a:ext>
+            </a:extLst>
+          </p:cNvPr>
+          <p:cNvSpPr>
+            <a:spLocks noGrp="1"/>
+          </p:cNvSpPr>
+          <p:nvPr>
+            <p:ph type="title"/>
+          </p:nvPr>
+        </p:nvSpPr>
+        <p:spPr>
+          <a:xfrm>
+            <a:off x="838200" y="365125"/>
+            <a:ext cx="9673424" cy="501567"/>
+          </a:xfrm>
+        </p:spPr>
+        <p:txBody>
+          <a:bodyPr>
+            <a:normAutofit/>
+          </a:bodyPr>
+          <a:lstStyle/>
+          <a:p>
+            <a:r>
+              <a:rPr lang="ko-KR" altLang="en-US" sz="2000" dirty="0"/>
+              <a:t>복도 </a:t>
+            </a:r>
+            <a:r>
+              <a:rPr lang="ko-KR" altLang="en-US" sz="2000" dirty="0" err="1"/>
+              <a:t>기믹</a:t>
+            </a:r>
+            <a:r>
+              <a:rPr lang="ko-KR" altLang="en-US" sz="2000" dirty="0"/>
+              <a:t> 추가</a:t>
+            </a:r>
+            <a:r>
+              <a:rPr lang="en-US" altLang="ko-KR" sz="2000" dirty="0"/>
+              <a:t>(</a:t>
+            </a:r>
+            <a:r>
+              <a:rPr lang="ko-KR" altLang="en-US" sz="2000" dirty="0"/>
+              <a:t>적을 추가하여 긴장감</a:t>
+            </a:r>
+            <a:r>
+              <a:rPr lang="en-US" altLang="ko-KR" sz="2000" dirty="0"/>
+              <a:t>, </a:t>
+            </a:r>
+            <a:r>
+              <a:rPr lang="ko-KR" altLang="en-US" sz="2000" dirty="0"/>
+              <a:t>공포 분위기 추가</a:t>
+            </a:r>
+            <a:r>
+              <a:rPr lang="en-US" altLang="ko-KR" sz="2000" dirty="0"/>
+              <a:t>)</a:t>
+            </a:r>
+            <a:r>
+              <a:rPr lang="ko-KR" altLang="en-US" sz="2000" dirty="0"/>
+              <a:t> </a:t>
+            </a:r>
+          </a:p>
+        </p:txBody>
+      </p:sp>
+      <p:sp>
+        <p:nvSpPr>
+          <p:cNvPr id="5" name="TextBox 4">
+            <a:extLst>
+              <a:ext uri="{FF2B5EF4-FFF2-40B4-BE49-F238E27FC236}">
+                <a16:creationId xmlns:a16="http://schemas.microsoft.com/office/drawing/2014/main" id="{7ABB3EE8-1B1E-4DBB-B8F0-97C69DD590C1}"/>
+              </a:ext>
+            </a:extLst>
+          </p:cNvPr>
+          <p:cNvSpPr txBox="1"/>
+          <p:nvPr/>
+        </p:nvSpPr>
+        <p:spPr>
+          <a:xfrm>
+            <a:off x="779228" y="1226287"/>
+            <a:ext cx="7975158" cy="369332"/>
+          </a:xfrm>
+          <a:prstGeom prst="rect">
+            <a:avLst/>
+          </a:prstGeom>
+          <a:noFill/>
+        </p:spPr>
+        <p:txBody>
+          <a:bodyPr wrap="square" rtlCol="0">
+            <a:spAutoFit/>
+          </a:bodyPr>
+          <a:lstStyle/>
+          <a:p>
+            <a:pPr marL="285750" indent="-285750">
+              <a:buFont typeface="Arial" panose="020B0604020202020204" pitchFamily="34" charset="0"/>
+              <a:buChar char="•"/>
+            </a:pPr>
+            <a:r>
+              <a:rPr lang="ko-KR" altLang="en-US" dirty="0"/>
+              <a:t>적이 클릭 되었거나 같은 장소에서 </a:t>
+            </a:r>
+            <a:r>
+              <a:rPr lang="en-US" altLang="ko-KR" dirty="0"/>
+              <a:t>1</a:t>
+            </a:r>
+            <a:r>
+              <a:rPr lang="ko-KR" altLang="en-US" dirty="0"/>
+              <a:t>분이 지나 플레이어가 죽었을 경우</a:t>
+            </a:r>
+          </a:p>
+        </p:txBody>
+      </p:sp>
+      <p:sp>
+        <p:nvSpPr>
+          <p:cNvPr id="8" name="TextBox 7">
+            <a:extLst>
+              <a:ext uri="{FF2B5EF4-FFF2-40B4-BE49-F238E27FC236}">
+                <a16:creationId xmlns:a16="http://schemas.microsoft.com/office/drawing/2014/main" id="{9832D293-0D34-4403-B510-EAECD8592E4F}"/>
+              </a:ext>
+            </a:extLst>
+          </p:cNvPr>
+          <p:cNvSpPr txBox="1"/>
+          <p:nvPr/>
+        </p:nvSpPr>
+        <p:spPr>
+          <a:xfrm>
+            <a:off x="838200" y="2315817"/>
+            <a:ext cx="5334662" cy="3416320"/>
+          </a:xfrm>
+          <a:prstGeom prst="rect">
+            <a:avLst/>
+          </a:prstGeom>
+          <a:noFill/>
+        </p:spPr>
+        <p:txBody>
+          <a:bodyPr wrap="square" rtlCol="0">
+            <a:spAutoFit/>
+          </a:bodyPr>
+          <a:lstStyle/>
+          <a:p>
+            <a:r>
+              <a:rPr lang="ko-KR" altLang="en-US" dirty="0"/>
+              <a:t>눈 깜박이는 효과 </a:t>
+            </a:r>
+            <a:r>
+              <a:rPr lang="en-US" altLang="ko-KR" dirty="0"/>
+              <a:t>(0.2</a:t>
+            </a:r>
+            <a:r>
+              <a:rPr lang="ko-KR" altLang="en-US" dirty="0"/>
+              <a:t>초</a:t>
+            </a:r>
+            <a:r>
+              <a:rPr lang="en-US" altLang="ko-KR" dirty="0"/>
+              <a:t>)(</a:t>
+            </a:r>
+            <a:r>
+              <a:rPr lang="en-US" altLang="ko-KR" dirty="0" err="1"/>
+              <a:t>mokotan</a:t>
+            </a:r>
+            <a:r>
+              <a:rPr lang="en-US" altLang="ko-KR" dirty="0"/>
+              <a:t>-&gt;</a:t>
+            </a:r>
+            <a:r>
+              <a:rPr lang="en-US" altLang="ko-KR" dirty="0" err="1"/>
+              <a:t>Prifab</a:t>
+            </a:r>
+            <a:r>
+              <a:rPr lang="en-US" altLang="ko-KR" dirty="0"/>
+              <a:t>-&gt;</a:t>
+            </a:r>
+            <a:r>
+              <a:rPr lang="en-US" altLang="ko-KR" dirty="0" err="1"/>
+              <a:t>BlinkManager</a:t>
+            </a:r>
+            <a:r>
+              <a:rPr lang="ko-KR" altLang="en-US" dirty="0"/>
+              <a:t> 사용</a:t>
+            </a:r>
+            <a:r>
+              <a:rPr lang="en-US" altLang="ko-KR" dirty="0"/>
+              <a:t>(</a:t>
+            </a:r>
+            <a:r>
+              <a:rPr lang="ko-KR" altLang="en-US" dirty="0"/>
+              <a:t>지금은 스페이스파를 눌렀을 때 깜박이도록 </a:t>
+            </a:r>
+            <a:r>
+              <a:rPr lang="ko-KR" altLang="en-US" dirty="0" err="1"/>
+              <a:t>코딩되어</a:t>
+            </a:r>
+            <a:r>
+              <a:rPr lang="ko-KR" altLang="en-US" dirty="0"/>
+              <a:t> 있음 수정해서 사용 </a:t>
+            </a:r>
+            <a:r>
+              <a:rPr lang="en-US" altLang="ko-KR" dirty="0"/>
+              <a:t>))</a:t>
+            </a:r>
+          </a:p>
+          <a:p>
+            <a:r>
+              <a:rPr lang="en-US" altLang="ko-KR" dirty="0"/>
+              <a:t>	-&gt; </a:t>
+            </a:r>
+            <a:r>
+              <a:rPr lang="ko-KR" altLang="en-US" dirty="0"/>
+              <a:t>애니메이션 실행</a:t>
+            </a:r>
+            <a:endParaRPr lang="en-US" altLang="ko-KR" dirty="0"/>
+          </a:p>
+          <a:p>
+            <a:r>
+              <a:rPr lang="en-US" altLang="ko-KR" dirty="0"/>
+              <a:t>		-&gt;</a:t>
+            </a:r>
+            <a:r>
+              <a:rPr lang="ko-KR" altLang="en-US" dirty="0"/>
+              <a:t>사망 </a:t>
+            </a:r>
+            <a:endParaRPr lang="en-US" altLang="ko-KR" dirty="0"/>
+          </a:p>
+          <a:p>
+            <a:endParaRPr lang="en-US" altLang="ko-KR" dirty="0"/>
+          </a:p>
+          <a:p>
+            <a:r>
+              <a:rPr lang="en-US" altLang="ko-KR" dirty="0"/>
+              <a:t>Scene-&gt;</a:t>
+            </a:r>
+            <a:r>
+              <a:rPr lang="en-US" altLang="ko-KR" dirty="0" err="1"/>
+              <a:t>Mokotan</a:t>
+            </a:r>
+            <a:r>
+              <a:rPr lang="en-US" altLang="ko-KR" dirty="0"/>
+              <a:t>-&gt;</a:t>
+            </a:r>
+            <a:r>
+              <a:rPr lang="en-US" altLang="ko-KR" dirty="0" err="1"/>
+              <a:t>CreateEffect</a:t>
+            </a:r>
+            <a:r>
+              <a:rPr lang="en-US" altLang="ko-KR" dirty="0"/>
+              <a:t>-&gt;shader-&gt;</a:t>
+            </a:r>
+            <a:r>
+              <a:rPr lang="en-US" altLang="ko-KR" dirty="0" err="1"/>
+              <a:t>BlinkShader</a:t>
+            </a:r>
+            <a:r>
+              <a:rPr lang="en-US" altLang="ko-KR" dirty="0"/>
+              <a:t> </a:t>
+            </a:r>
+            <a:r>
+              <a:rPr lang="ko-KR" altLang="en-US" dirty="0"/>
+              <a:t>사용 </a:t>
+            </a:r>
+            <a:endParaRPr lang="en-US" altLang="ko-KR" dirty="0"/>
+          </a:p>
+          <a:p>
+            <a:endParaRPr lang="en-US" altLang="ko-KR" dirty="0"/>
+          </a:p>
+          <a:p>
+            <a:r>
+              <a:rPr lang="ko-KR" altLang="en-US" dirty="0"/>
+              <a:t>플로우</a:t>
+            </a:r>
+            <a:endParaRPr lang="en-US" altLang="ko-KR" dirty="0"/>
+          </a:p>
+          <a:p>
+            <a:r>
+              <a:rPr lang="ko-KR" altLang="en-US" dirty="0"/>
+              <a:t>클릭 </a:t>
+            </a:r>
+            <a:r>
+              <a:rPr lang="en-US" altLang="ko-KR" dirty="0"/>
+              <a:t>or 1</a:t>
+            </a:r>
+            <a:r>
+              <a:rPr lang="ko-KR" altLang="en-US" dirty="0"/>
+              <a:t>분 지남</a:t>
+            </a:r>
+            <a:r>
+              <a:rPr lang="en-US" altLang="ko-KR" dirty="0"/>
+              <a:t>-&gt; </a:t>
+            </a:r>
+            <a:r>
+              <a:rPr lang="ko-KR" altLang="en-US" dirty="0"/>
+              <a:t>플레이어의 모든 행동 정지</a:t>
+            </a:r>
+            <a:r>
+              <a:rPr lang="en-US" altLang="ko-KR" dirty="0"/>
+              <a:t>-&gt; </a:t>
+            </a:r>
+            <a:r>
+              <a:rPr lang="ko-KR" altLang="en-US" dirty="0" err="1"/>
+              <a:t>눈깜박임</a:t>
+            </a:r>
+            <a:r>
+              <a:rPr lang="en-US" altLang="ko-KR" dirty="0"/>
+              <a:t>-&gt; </a:t>
+            </a:r>
+            <a:r>
+              <a:rPr lang="ko-KR" altLang="en-US" dirty="0"/>
+              <a:t>애니메이션 실행</a:t>
+            </a:r>
+            <a:r>
+              <a:rPr lang="en-US" altLang="ko-KR" dirty="0"/>
+              <a:t> -&gt; </a:t>
+            </a:r>
+            <a:r>
+              <a:rPr lang="ko-KR" altLang="en-US" dirty="0"/>
+              <a:t>사망 페이지</a:t>
+            </a:r>
+            <a:endParaRPr lang="en-US" altLang="ko-KR" dirty="0"/>
+          </a:p>
+        </p:txBody>
+      </p:sp>
+    </p:spTree>
+    <p:extLst>
+      <p:ext uri="{BB962C8B-B14F-4D97-AF65-F5344CB8AC3E}">
+        <p14:creationId xmlns:p14="http://schemas.microsoft.com/office/powerpoint/2010/main" val="1850710255"/>
+      </p:ext>
+    </p:extLst>
+  </p:cSld>
+  <p:clrMapOvr>
+    <a:masterClrMapping/>
+  </p:clrMapOvr>
+</p:sld>
+</file>
+
+<file path=ppt/slides/slide13.xml><?xml version="1.0" encoding="utf-8"?>
+<p:sld xmlns:a="http://schemas.openxmlformats.org/drawingml/2006/main" xmlns:r="http://schemas.openxmlformats.org/officeDocument/2006/relationships" xmlns:p="http://schemas.openxmlformats.org/presentationml/2006/main">
+  <p:cSld>
+    <p:spTree>
+      <p:nvGrpSpPr>
+        <p:cNvPr id="1" name=""/>
+        <p:cNvGrpSpPr/>
+        <p:nvPr/>
+      </p:nvGrpSpPr>
+      <p:grpSpPr>
+        <a:xfrm>
+          <a:off x="0" y="0"/>
+          <a:ext cx="0" cy="0"/>
+          <a:chOff x="0" y="0"/>
+          <a:chExt cx="0" cy="0"/>
+        </a:xfrm>
+      </p:grpSpPr>
+      <p:sp>
+        <p:nvSpPr>
+          <p:cNvPr id="2" name="제목 1">
+            <a:extLst>
+              <a:ext uri="{FF2B5EF4-FFF2-40B4-BE49-F238E27FC236}">
                 <a16:creationId xmlns:a16="http://schemas.microsoft.com/office/drawing/2014/main" id="{C2C5EB99-E3DA-46BF-9406-BE4AC1C48AA5}"/>
               </a:ext>
             </a:extLst>

--- a/기획서/현재 플로우 직관성 + 맵 제작.pptx
+++ b/기획서/현재 플로우 직관성 + 맵 제작.pptx
@@ -16,8 +16,9 @@
     <p:sldId id="263" r:id="rId10"/>
     <p:sldId id="265" r:id="rId11"/>
     <p:sldId id="269" r:id="rId12"/>
-    <p:sldId id="270" r:id="rId13"/>
-    <p:sldId id="268" r:id="rId14"/>
+    <p:sldId id="271" r:id="rId13"/>
+    <p:sldId id="270" r:id="rId14"/>
+    <p:sldId id="268" r:id="rId15"/>
   </p:sldIdLst>
   <p:sldSz cx="12192000" cy="6858000"/>
   <p:notesSz cx="6858000" cy="9144000"/>
@@ -271,7 +272,7 @@
           <a:p>
             <a:fld id="{A14A861B-BBF0-4E9D-83EB-CA452E10C33B}" type="datetimeFigureOut">
               <a:rPr lang="ko-KR" altLang="en-US" smtClean="0"/>
-              <a:t>2026-03-07</a:t>
+              <a:t>2026-03-09</a:t>
             </a:fld>
             <a:endParaRPr lang="ko-KR" altLang="en-US"/>
           </a:p>
@@ -469,7 +470,7 @@
           <a:p>
             <a:fld id="{A14A861B-BBF0-4E9D-83EB-CA452E10C33B}" type="datetimeFigureOut">
               <a:rPr lang="ko-KR" altLang="en-US" smtClean="0"/>
-              <a:t>2026-03-07</a:t>
+              <a:t>2026-03-09</a:t>
             </a:fld>
             <a:endParaRPr lang="ko-KR" altLang="en-US"/>
           </a:p>
@@ -677,7 +678,7 @@
           <a:p>
             <a:fld id="{A14A861B-BBF0-4E9D-83EB-CA452E10C33B}" type="datetimeFigureOut">
               <a:rPr lang="ko-KR" altLang="en-US" smtClean="0"/>
-              <a:t>2026-03-07</a:t>
+              <a:t>2026-03-09</a:t>
             </a:fld>
             <a:endParaRPr lang="ko-KR" altLang="en-US"/>
           </a:p>
@@ -875,7 +876,7 @@
           <a:p>
             <a:fld id="{A14A861B-BBF0-4E9D-83EB-CA452E10C33B}" type="datetimeFigureOut">
               <a:rPr lang="ko-KR" altLang="en-US" smtClean="0"/>
-              <a:t>2026-03-07</a:t>
+              <a:t>2026-03-09</a:t>
             </a:fld>
             <a:endParaRPr lang="ko-KR" altLang="en-US"/>
           </a:p>
@@ -1150,7 +1151,7 @@
           <a:p>
             <a:fld id="{A14A861B-BBF0-4E9D-83EB-CA452E10C33B}" type="datetimeFigureOut">
               <a:rPr lang="ko-KR" altLang="en-US" smtClean="0"/>
-              <a:t>2026-03-07</a:t>
+              <a:t>2026-03-09</a:t>
             </a:fld>
             <a:endParaRPr lang="ko-KR" altLang="en-US"/>
           </a:p>
@@ -1415,7 +1416,7 @@
           <a:p>
             <a:fld id="{A14A861B-BBF0-4E9D-83EB-CA452E10C33B}" type="datetimeFigureOut">
               <a:rPr lang="ko-KR" altLang="en-US" smtClean="0"/>
-              <a:t>2026-03-07</a:t>
+              <a:t>2026-03-09</a:t>
             </a:fld>
             <a:endParaRPr lang="ko-KR" altLang="en-US"/>
           </a:p>
@@ -1827,7 +1828,7 @@
           <a:p>
             <a:fld id="{A14A861B-BBF0-4E9D-83EB-CA452E10C33B}" type="datetimeFigureOut">
               <a:rPr lang="ko-KR" altLang="en-US" smtClean="0"/>
-              <a:t>2026-03-07</a:t>
+              <a:t>2026-03-09</a:t>
             </a:fld>
             <a:endParaRPr lang="ko-KR" altLang="en-US"/>
           </a:p>
@@ -1968,7 +1969,7 @@
           <a:p>
             <a:fld id="{A14A861B-BBF0-4E9D-83EB-CA452E10C33B}" type="datetimeFigureOut">
               <a:rPr lang="ko-KR" altLang="en-US" smtClean="0"/>
-              <a:t>2026-03-07</a:t>
+              <a:t>2026-03-09</a:t>
             </a:fld>
             <a:endParaRPr lang="ko-KR" altLang="en-US"/>
           </a:p>
@@ -2081,7 +2082,7 @@
           <a:p>
             <a:fld id="{A14A861B-BBF0-4E9D-83EB-CA452E10C33B}" type="datetimeFigureOut">
               <a:rPr lang="ko-KR" altLang="en-US" smtClean="0"/>
-              <a:t>2026-03-07</a:t>
+              <a:t>2026-03-09</a:t>
             </a:fld>
             <a:endParaRPr lang="ko-KR" altLang="en-US"/>
           </a:p>
@@ -2392,7 +2393,7 @@
           <a:p>
             <a:fld id="{A14A861B-BBF0-4E9D-83EB-CA452E10C33B}" type="datetimeFigureOut">
               <a:rPr lang="ko-KR" altLang="en-US" smtClean="0"/>
-              <a:t>2026-03-07</a:t>
+              <a:t>2026-03-09</a:t>
             </a:fld>
             <a:endParaRPr lang="ko-KR" altLang="en-US"/>
           </a:p>
@@ -2680,7 +2681,7 @@
           <a:p>
             <a:fld id="{A14A861B-BBF0-4E9D-83EB-CA452E10C33B}" type="datetimeFigureOut">
               <a:rPr lang="ko-KR" altLang="en-US" smtClean="0"/>
-              <a:t>2026-03-07</a:t>
+              <a:t>2026-03-09</a:t>
             </a:fld>
             <a:endParaRPr lang="ko-KR" altLang="en-US"/>
           </a:p>
@@ -2921,7 +2922,7 @@
           <a:p>
             <a:fld id="{A14A861B-BBF0-4E9D-83EB-CA452E10C33B}" type="datetimeFigureOut">
               <a:rPr lang="ko-KR" altLang="en-US" smtClean="0"/>
-              <a:t>2026-03-07</a:t>
+              <a:t>2026-03-09</a:t>
             </a:fld>
             <a:endParaRPr lang="ko-KR" altLang="en-US"/>
           </a:p>
@@ -4225,6 +4226,354 @@
         <p:spPr>
           <a:xfrm>
             <a:off x="779228" y="1226287"/>
+            <a:ext cx="5955527" cy="369332"/>
+          </a:xfrm>
+          <a:prstGeom prst="rect">
+            <a:avLst/>
+          </a:prstGeom>
+          <a:noFill/>
+        </p:spPr>
+        <p:txBody>
+          <a:bodyPr wrap="square" rtlCol="0">
+            <a:spAutoFit/>
+          </a:bodyPr>
+          <a:lstStyle/>
+          <a:p>
+            <a:pPr marL="285750" indent="-285750">
+              <a:buFont typeface="Arial" panose="020B0604020202020204" pitchFamily="34" charset="0"/>
+              <a:buChar char="•"/>
+            </a:pPr>
+            <a:r>
+              <a:rPr lang="ko-KR" altLang="en-US"/>
+              <a:t>매인 홀에 들어갔을 때</a:t>
+            </a:r>
+          </a:p>
+        </p:txBody>
+      </p:sp>
+      <p:pic>
+        <p:nvPicPr>
+          <p:cNvPr id="6" name="그림 5">
+            <a:extLst>
+              <a:ext uri="{FF2B5EF4-FFF2-40B4-BE49-F238E27FC236}">
+                <a16:creationId xmlns:a16="http://schemas.microsoft.com/office/drawing/2014/main" id="{C00A23EE-B157-4C59-9732-4351FDCDC909}"/>
+              </a:ext>
+            </a:extLst>
+          </p:cNvPr>
+          <p:cNvPicPr>
+            <a:picLocks noChangeAspect="1"/>
+          </p:cNvPicPr>
+          <p:nvPr/>
+        </p:nvPicPr>
+        <p:blipFill>
+          <a:blip r:embed="rId2"/>
+          <a:stretch>
+            <a:fillRect/>
+          </a:stretch>
+        </p:blipFill>
+        <p:spPr>
+          <a:xfrm>
+            <a:off x="838201" y="2392536"/>
+            <a:ext cx="4695908" cy="3173377"/>
+          </a:xfrm>
+          <a:prstGeom prst="rect">
+            <a:avLst/>
+          </a:prstGeom>
+        </p:spPr>
+      </p:pic>
+      <p:sp>
+        <p:nvSpPr>
+          <p:cNvPr id="7" name="액자 6">
+            <a:extLst>
+              <a:ext uri="{FF2B5EF4-FFF2-40B4-BE49-F238E27FC236}">
+                <a16:creationId xmlns:a16="http://schemas.microsoft.com/office/drawing/2014/main" id="{D86F8763-C96D-4AFB-855D-1E115CC25C4E}"/>
+              </a:ext>
+            </a:extLst>
+          </p:cNvPr>
+          <p:cNvSpPr/>
+          <p:nvPr/>
+        </p:nvSpPr>
+        <p:spPr>
+          <a:xfrm>
+            <a:off x="4492487" y="3538330"/>
+            <a:ext cx="492981" cy="1041621"/>
+          </a:xfrm>
+          <a:prstGeom prst="frame">
+            <a:avLst/>
+          </a:prstGeom>
+          <a:solidFill>
+            <a:srgbClr val="FF0000"/>
+          </a:solidFill>
+          <a:ln>
+            <a:solidFill>
+              <a:srgbClr val="FF0000"/>
+            </a:solidFill>
+          </a:ln>
+        </p:spPr>
+        <p:style>
+          <a:lnRef idx="2">
+            <a:schemeClr val="accent1">
+              <a:shade val="50000"/>
+            </a:schemeClr>
+          </a:lnRef>
+          <a:fillRef idx="1">
+            <a:schemeClr val="accent1"/>
+          </a:fillRef>
+          <a:effectRef idx="0">
+            <a:schemeClr val="accent1"/>
+          </a:effectRef>
+          <a:fontRef idx="minor">
+            <a:schemeClr val="lt1"/>
+          </a:fontRef>
+        </p:style>
+        <p:txBody>
+          <a:bodyPr rtlCol="0" anchor="ctr"/>
+          <a:lstStyle/>
+          <a:p>
+            <a:pPr algn="ctr"/>
+            <a:endParaRPr lang="ko-KR" altLang="en-US">
+              <a:solidFill>
+                <a:schemeClr val="tx1"/>
+              </a:solidFill>
+            </a:endParaRPr>
+          </a:p>
+        </p:txBody>
+      </p:sp>
+      <p:sp>
+        <p:nvSpPr>
+          <p:cNvPr id="8" name="TextBox 7">
+            <a:extLst>
+              <a:ext uri="{FF2B5EF4-FFF2-40B4-BE49-F238E27FC236}">
+                <a16:creationId xmlns:a16="http://schemas.microsoft.com/office/drawing/2014/main" id="{9832D293-0D34-4403-B510-EAECD8592E4F}"/>
+              </a:ext>
+            </a:extLst>
+          </p:cNvPr>
+          <p:cNvSpPr txBox="1"/>
+          <p:nvPr/>
+        </p:nvSpPr>
+        <p:spPr>
+          <a:xfrm>
+            <a:off x="6019137" y="2364705"/>
+            <a:ext cx="5334662" cy="2862322"/>
+          </a:xfrm>
+          <a:prstGeom prst="rect">
+            <a:avLst/>
+          </a:prstGeom>
+          <a:noFill/>
+        </p:spPr>
+        <p:txBody>
+          <a:bodyPr wrap="square" rtlCol="0">
+            <a:spAutoFit/>
+          </a:bodyPr>
+          <a:lstStyle/>
+          <a:p>
+            <a:r>
+              <a:rPr lang="en-US" altLang="ko-KR" dirty="0"/>
+              <a:t>-</a:t>
+            </a:r>
+            <a:r>
+              <a:rPr lang="ko-KR" altLang="en-US" dirty="0"/>
+              <a:t>앵무새는 적과 같이 있으면 안됨</a:t>
+            </a:r>
+            <a:endParaRPr lang="en-US" altLang="ko-KR" dirty="0"/>
+          </a:p>
+          <a:p>
+            <a:r>
+              <a:rPr lang="en-US" altLang="ko-KR" dirty="0"/>
+              <a:t>-&gt; </a:t>
+            </a:r>
+            <a:r>
+              <a:rPr lang="ko-KR" altLang="en-US" dirty="0"/>
+              <a:t>처음 </a:t>
+            </a:r>
+            <a:r>
+              <a:rPr lang="en-US" altLang="ko-KR" dirty="0" err="1"/>
+              <a:t>hall_playable</a:t>
+            </a:r>
+            <a:r>
+              <a:rPr lang="ko-KR" altLang="en-US" dirty="0"/>
+              <a:t> </a:t>
+            </a:r>
+            <a:r>
+              <a:rPr lang="ko-KR" altLang="en-US" dirty="0" err="1"/>
+              <a:t>씬에</a:t>
+            </a:r>
+            <a:r>
+              <a:rPr lang="ko-KR" altLang="en-US" dirty="0"/>
+              <a:t> 들어가면 앵무새가 없어야 함</a:t>
+            </a:r>
+            <a:r>
+              <a:rPr lang="en-US" altLang="ko-KR" dirty="0"/>
+              <a:t>.</a:t>
+            </a:r>
+          </a:p>
+          <a:p>
+            <a:endParaRPr lang="en-US" altLang="ko-KR" dirty="0"/>
+          </a:p>
+          <a:p>
+            <a:r>
+              <a:rPr lang="en-US" altLang="ko-KR" dirty="0"/>
+              <a:t>-&gt; </a:t>
+            </a:r>
+            <a:r>
+              <a:rPr lang="ko-KR" altLang="en-US" dirty="0"/>
+              <a:t>적을 한 번 클릭 후 다시 </a:t>
+            </a:r>
+            <a:r>
+              <a:rPr lang="en-US" altLang="ko-KR" dirty="0" err="1"/>
+              <a:t>hall_playable</a:t>
+            </a:r>
+            <a:r>
+              <a:rPr lang="ko-KR" altLang="en-US" dirty="0" err="1"/>
+              <a:t>씬이</a:t>
+            </a:r>
+            <a:r>
+              <a:rPr lang="ko-KR" altLang="en-US" dirty="0"/>
+              <a:t> 로드 되면 그때 적이 사라지고 앵무새가 나타나도록 해야함</a:t>
+            </a:r>
+            <a:r>
+              <a:rPr lang="en-US" altLang="ko-KR" dirty="0"/>
+              <a:t>.</a:t>
+            </a:r>
+          </a:p>
+          <a:p>
+            <a:endParaRPr lang="en-US" altLang="ko-KR" dirty="0"/>
+          </a:p>
+          <a:p>
+            <a:r>
+              <a:rPr lang="en-US" altLang="ko-KR" dirty="0"/>
+              <a:t>=&gt; </a:t>
+            </a:r>
+            <a:r>
+              <a:rPr lang="ko-KR" altLang="en-US" dirty="0"/>
+              <a:t>이것은 앵무새가 적이 아닌 아군이라는 인식을 주면서 적이 </a:t>
+            </a:r>
+            <a:r>
+              <a:rPr lang="ko-KR" altLang="en-US" dirty="0" err="1"/>
+              <a:t>위험하다라는</a:t>
+            </a:r>
+            <a:r>
+              <a:rPr lang="ko-KR" altLang="en-US" dirty="0"/>
+              <a:t> 인식을 주기 위함</a:t>
+            </a:r>
+            <a:r>
+              <a:rPr lang="en-US" altLang="ko-KR" dirty="0"/>
+              <a:t>.</a:t>
+            </a:r>
+          </a:p>
+        </p:txBody>
+      </p:sp>
+    </p:spTree>
+    <p:extLst>
+      <p:ext uri="{BB962C8B-B14F-4D97-AF65-F5344CB8AC3E}">
+        <p14:creationId xmlns:p14="http://schemas.microsoft.com/office/powerpoint/2010/main" val="833253528"/>
+      </p:ext>
+    </p:extLst>
+  </p:cSld>
+  <p:clrMapOvr>
+    <a:masterClrMapping/>
+  </p:clrMapOvr>
+</p:sld>
+</file>
+
+<file path=ppt/slides/slide13.xml><?xml version="1.0" encoding="utf-8"?>
+<p:sld xmlns:a="http://schemas.openxmlformats.org/drawingml/2006/main" xmlns:r="http://schemas.openxmlformats.org/officeDocument/2006/relationships" xmlns:p="http://schemas.openxmlformats.org/presentationml/2006/main">
+  <p:cSld>
+    <p:spTree>
+      <p:nvGrpSpPr>
+        <p:cNvPr id="1" name=""/>
+        <p:cNvGrpSpPr/>
+        <p:nvPr/>
+      </p:nvGrpSpPr>
+      <p:grpSpPr>
+        <a:xfrm>
+          <a:off x="0" y="0"/>
+          <a:ext cx="0" cy="0"/>
+          <a:chOff x="0" y="0"/>
+          <a:chExt cx="0" cy="0"/>
+        </a:xfrm>
+      </p:grpSpPr>
+      <p:sp>
+        <p:nvSpPr>
+          <p:cNvPr id="2" name="제목 1">
+            <a:extLst>
+              <a:ext uri="{FF2B5EF4-FFF2-40B4-BE49-F238E27FC236}">
+                <a16:creationId xmlns:a16="http://schemas.microsoft.com/office/drawing/2014/main" id="{F85E0F81-05E7-4E48-8D3F-783FC5C89271}"/>
+              </a:ext>
+            </a:extLst>
+          </p:cNvPr>
+          <p:cNvSpPr>
+            <a:spLocks noGrp="1"/>
+          </p:cNvSpPr>
+          <p:nvPr>
+            <p:ph type="title"/>
+          </p:nvPr>
+        </p:nvSpPr>
+        <p:spPr>
+          <a:xfrm>
+            <a:off x="838200" y="365125"/>
+            <a:ext cx="9673424" cy="501567"/>
+          </a:xfrm>
+        </p:spPr>
+        <p:txBody>
+          <a:bodyPr>
+            <a:normAutofit/>
+          </a:bodyPr>
+          <a:lstStyle/>
+          <a:p>
+            <a:r>
+              <a:rPr lang="ko-KR" altLang="en-US" sz="2000" dirty="0"/>
+              <a:t>복도 </a:t>
+            </a:r>
+            <a:r>
+              <a:rPr lang="ko-KR" altLang="en-US" sz="2000" dirty="0" err="1"/>
+              <a:t>기믹</a:t>
+            </a:r>
+            <a:r>
+              <a:rPr lang="ko-KR" altLang="en-US" sz="2000" dirty="0"/>
+              <a:t> 추가</a:t>
+            </a:r>
+            <a:r>
+              <a:rPr lang="en-US" altLang="ko-KR" sz="2000" dirty="0"/>
+              <a:t>(</a:t>
+            </a:r>
+            <a:r>
+              <a:rPr lang="ko-KR" altLang="en-US" sz="2000" dirty="0"/>
+              <a:t>적을 추가하여 긴장감</a:t>
+            </a:r>
+            <a:r>
+              <a:rPr lang="en-US" altLang="ko-KR" sz="2000" dirty="0"/>
+              <a:t>, </a:t>
+            </a:r>
+            <a:r>
+              <a:rPr lang="ko-KR" altLang="en-US" sz="2000" dirty="0"/>
+              <a:t>공포 분위기 추가</a:t>
+            </a:r>
+            <a:r>
+              <a:rPr lang="en-US" altLang="ko-KR" sz="2000" dirty="0"/>
+              <a:t>)</a:t>
+            </a:r>
+            <a:r>
+              <a:rPr lang="ko-KR" altLang="en-US" sz="2000" dirty="0"/>
+              <a:t> </a:t>
+            </a:r>
+          </a:p>
+        </p:txBody>
+      </p:sp>
+      <p:sp>
+        <p:nvSpPr>
+          <p:cNvPr id="5" name="TextBox 4">
+            <a:extLst>
+              <a:ext uri="{FF2B5EF4-FFF2-40B4-BE49-F238E27FC236}">
+                <a16:creationId xmlns:a16="http://schemas.microsoft.com/office/drawing/2014/main" id="{7ABB3EE8-1B1E-4DBB-B8F0-97C69DD590C1}"/>
+              </a:ext>
+            </a:extLst>
+          </p:cNvPr>
+          <p:cNvSpPr txBox="1"/>
+          <p:nvPr/>
+        </p:nvSpPr>
+        <p:spPr>
+          <a:xfrm>
+            <a:off x="779228" y="1226287"/>
             <a:ext cx="7975158" cy="369332"/>
           </a:xfrm>
           <a:prstGeom prst="rect">
@@ -4478,7 +4827,7 @@
 </p:sld>
 </file>
 
-<file path=ppt/slides/slide13.xml><?xml version="1.0" encoding="utf-8"?>
+<file path=ppt/slides/slide14.xml><?xml version="1.0" encoding="utf-8"?>
 <p:sld xmlns:a="http://schemas.openxmlformats.org/drawingml/2006/main" xmlns:r="http://schemas.openxmlformats.org/officeDocument/2006/relationships" xmlns:p="http://schemas.openxmlformats.org/presentationml/2006/main">
   <p:cSld>
     <p:spTree>

--- a/기획서/현재 플로우 직관성 + 맵 제작.pptx
+++ b/기획서/현재 플로우 직관성 + 맵 제작.pptx
@@ -8,17 +8,16 @@
     <p:sldId id="256" r:id="rId2"/>
     <p:sldId id="257" r:id="rId3"/>
     <p:sldId id="266" r:id="rId4"/>
-    <p:sldId id="258" r:id="rId5"/>
-    <p:sldId id="260" r:id="rId6"/>
-    <p:sldId id="262" r:id="rId7"/>
-    <p:sldId id="261" r:id="rId8"/>
-    <p:sldId id="267" r:id="rId9"/>
-    <p:sldId id="263" r:id="rId10"/>
-    <p:sldId id="265" r:id="rId11"/>
-    <p:sldId id="269" r:id="rId12"/>
-    <p:sldId id="271" r:id="rId13"/>
-    <p:sldId id="270" r:id="rId14"/>
-    <p:sldId id="268" r:id="rId15"/>
+    <p:sldId id="260" r:id="rId5"/>
+    <p:sldId id="262" r:id="rId6"/>
+    <p:sldId id="261" r:id="rId7"/>
+    <p:sldId id="267" r:id="rId8"/>
+    <p:sldId id="263" r:id="rId9"/>
+    <p:sldId id="265" r:id="rId10"/>
+    <p:sldId id="269" r:id="rId11"/>
+    <p:sldId id="271" r:id="rId12"/>
+    <p:sldId id="270" r:id="rId13"/>
+    <p:sldId id="268" r:id="rId14"/>
   </p:sldIdLst>
   <p:sldSz cx="12192000" cy="6858000"/>
   <p:notesSz cx="6858000" cy="9144000"/>
@@ -272,7 +271,7 @@
           <a:p>
             <a:fld id="{A14A861B-BBF0-4E9D-83EB-CA452E10C33B}" type="datetimeFigureOut">
               <a:rPr lang="ko-KR" altLang="en-US" smtClean="0"/>
-              <a:t>2026-03-09</a:t>
+              <a:t>2026-03-10</a:t>
             </a:fld>
             <a:endParaRPr lang="ko-KR" altLang="en-US"/>
           </a:p>
@@ -470,7 +469,7 @@
           <a:p>
             <a:fld id="{A14A861B-BBF0-4E9D-83EB-CA452E10C33B}" type="datetimeFigureOut">
               <a:rPr lang="ko-KR" altLang="en-US" smtClean="0"/>
-              <a:t>2026-03-09</a:t>
+              <a:t>2026-03-10</a:t>
             </a:fld>
             <a:endParaRPr lang="ko-KR" altLang="en-US"/>
           </a:p>
@@ -678,7 +677,7 @@
           <a:p>
             <a:fld id="{A14A861B-BBF0-4E9D-83EB-CA452E10C33B}" type="datetimeFigureOut">
               <a:rPr lang="ko-KR" altLang="en-US" smtClean="0"/>
-              <a:t>2026-03-09</a:t>
+              <a:t>2026-03-10</a:t>
             </a:fld>
             <a:endParaRPr lang="ko-KR" altLang="en-US"/>
           </a:p>
@@ -876,7 +875,7 @@
           <a:p>
             <a:fld id="{A14A861B-BBF0-4E9D-83EB-CA452E10C33B}" type="datetimeFigureOut">
               <a:rPr lang="ko-KR" altLang="en-US" smtClean="0"/>
-              <a:t>2026-03-09</a:t>
+              <a:t>2026-03-10</a:t>
             </a:fld>
             <a:endParaRPr lang="ko-KR" altLang="en-US"/>
           </a:p>
@@ -1151,7 +1150,7 @@
           <a:p>
             <a:fld id="{A14A861B-BBF0-4E9D-83EB-CA452E10C33B}" type="datetimeFigureOut">
               <a:rPr lang="ko-KR" altLang="en-US" smtClean="0"/>
-              <a:t>2026-03-09</a:t>
+              <a:t>2026-03-10</a:t>
             </a:fld>
             <a:endParaRPr lang="ko-KR" altLang="en-US"/>
           </a:p>
@@ -1416,7 +1415,7 @@
           <a:p>
             <a:fld id="{A14A861B-BBF0-4E9D-83EB-CA452E10C33B}" type="datetimeFigureOut">
               <a:rPr lang="ko-KR" altLang="en-US" smtClean="0"/>
-              <a:t>2026-03-09</a:t>
+              <a:t>2026-03-10</a:t>
             </a:fld>
             <a:endParaRPr lang="ko-KR" altLang="en-US"/>
           </a:p>
@@ -1828,7 +1827,7 @@
           <a:p>
             <a:fld id="{A14A861B-BBF0-4E9D-83EB-CA452E10C33B}" type="datetimeFigureOut">
               <a:rPr lang="ko-KR" altLang="en-US" smtClean="0"/>
-              <a:t>2026-03-09</a:t>
+              <a:t>2026-03-10</a:t>
             </a:fld>
             <a:endParaRPr lang="ko-KR" altLang="en-US"/>
           </a:p>
@@ -1969,7 +1968,7 @@
           <a:p>
             <a:fld id="{A14A861B-BBF0-4E9D-83EB-CA452E10C33B}" type="datetimeFigureOut">
               <a:rPr lang="ko-KR" altLang="en-US" smtClean="0"/>
-              <a:t>2026-03-09</a:t>
+              <a:t>2026-03-10</a:t>
             </a:fld>
             <a:endParaRPr lang="ko-KR" altLang="en-US"/>
           </a:p>
@@ -2082,7 +2081,7 @@
           <a:p>
             <a:fld id="{A14A861B-BBF0-4E9D-83EB-CA452E10C33B}" type="datetimeFigureOut">
               <a:rPr lang="ko-KR" altLang="en-US" smtClean="0"/>
-              <a:t>2026-03-09</a:t>
+              <a:t>2026-03-10</a:t>
             </a:fld>
             <a:endParaRPr lang="ko-KR" altLang="en-US"/>
           </a:p>
@@ -2393,7 +2392,7 @@
           <a:p>
             <a:fld id="{A14A861B-BBF0-4E9D-83EB-CA452E10C33B}" type="datetimeFigureOut">
               <a:rPr lang="ko-KR" altLang="en-US" smtClean="0"/>
-              <a:t>2026-03-09</a:t>
+              <a:t>2026-03-10</a:t>
             </a:fld>
             <a:endParaRPr lang="ko-KR" altLang="en-US"/>
           </a:p>
@@ -2681,7 +2680,7 @@
           <a:p>
             <a:fld id="{A14A861B-BBF0-4E9D-83EB-CA452E10C33B}" type="datetimeFigureOut">
               <a:rPr lang="ko-KR" altLang="en-US" smtClean="0"/>
-              <a:t>2026-03-09</a:t>
+              <a:t>2026-03-10</a:t>
             </a:fld>
             <a:endParaRPr lang="ko-KR" altLang="en-US"/>
           </a:p>
@@ -2922,7 +2921,7 @@
           <a:p>
             <a:fld id="{A14A861B-BBF0-4E9D-83EB-CA452E10C33B}" type="datetimeFigureOut">
               <a:rPr lang="ko-KR" altLang="en-US" smtClean="0"/>
-              <a:t>2026-03-09</a:t>
+              <a:t>2026-03-10</a:t>
             </a:fld>
             <a:endParaRPr lang="ko-KR" altLang="en-US"/>
           </a:p>
@@ -3418,373 +3417,6 @@
           <p:cNvPr id="2" name="제목 1">
             <a:extLst>
               <a:ext uri="{FF2B5EF4-FFF2-40B4-BE49-F238E27FC236}">
-                <a16:creationId xmlns:a16="http://schemas.microsoft.com/office/drawing/2014/main" id="{C2C5EB99-E3DA-46BF-9406-BE4AC1C48AA5}"/>
-              </a:ext>
-            </a:extLst>
-          </p:cNvPr>
-          <p:cNvSpPr>
-            <a:spLocks noGrp="1"/>
-          </p:cNvSpPr>
-          <p:nvPr>
-            <p:ph type="title"/>
-          </p:nvPr>
-        </p:nvSpPr>
-        <p:spPr/>
-        <p:txBody>
-          <a:bodyPr/>
-          <a:lstStyle/>
-          <a:p>
-            <a:r>
-              <a:rPr lang="ko-KR" altLang="en-US" dirty="0" err="1"/>
-              <a:t>맵아트</a:t>
-            </a:r>
-            <a:r>
-              <a:rPr lang="ko-KR" altLang="en-US" dirty="0"/>
-              <a:t> 레퍼런스 </a:t>
-            </a:r>
-          </a:p>
-        </p:txBody>
-      </p:sp>
-      <p:sp>
-        <p:nvSpPr>
-          <p:cNvPr id="3" name="내용 개체 틀 2">
-            <a:extLst>
-              <a:ext uri="{FF2B5EF4-FFF2-40B4-BE49-F238E27FC236}">
-                <a16:creationId xmlns:a16="http://schemas.microsoft.com/office/drawing/2014/main" id="{BE8EB9C6-F307-41B3-9AF2-5A062E3A3E48}"/>
-              </a:ext>
-            </a:extLst>
-          </p:cNvPr>
-          <p:cNvSpPr>
-            <a:spLocks noGrp="1"/>
-          </p:cNvSpPr>
-          <p:nvPr>
-            <p:ph idx="1"/>
-          </p:nvPr>
-        </p:nvSpPr>
-        <p:spPr>
-          <a:xfrm>
-            <a:off x="838200" y="1825625"/>
-            <a:ext cx="5170714" cy="4351338"/>
-          </a:xfrm>
-        </p:spPr>
-        <p:txBody>
-          <a:bodyPr/>
-          <a:lstStyle/>
-          <a:p>
-            <a:endParaRPr lang="en-US" altLang="ko-KR" dirty="0"/>
-          </a:p>
-          <a:p>
-            <a:pPr marL="0" indent="0">
-              <a:buNone/>
-            </a:pPr>
-            <a:endParaRPr lang="en-US" altLang="ko-KR" dirty="0"/>
-          </a:p>
-          <a:p>
-            <a:endParaRPr lang="en-US" altLang="ko-KR" dirty="0"/>
-          </a:p>
-          <a:p>
-            <a:pPr marL="0" indent="0">
-              <a:buNone/>
-            </a:pPr>
-            <a:endParaRPr lang="en-US" altLang="ko-KR" dirty="0"/>
-          </a:p>
-          <a:p>
-            <a:pPr marL="0" indent="0">
-              <a:buNone/>
-            </a:pPr>
-            <a:endParaRPr lang="ko-KR" altLang="en-US" dirty="0"/>
-          </a:p>
-        </p:txBody>
-      </p:sp>
-      <p:sp>
-        <p:nvSpPr>
-          <p:cNvPr id="4" name="TextBox 3">
-            <a:extLst>
-              <a:ext uri="{FF2B5EF4-FFF2-40B4-BE49-F238E27FC236}">
-                <a16:creationId xmlns:a16="http://schemas.microsoft.com/office/drawing/2014/main" id="{584DBA01-033E-45CE-B7BE-9391F6274562}"/>
-              </a:ext>
-            </a:extLst>
-          </p:cNvPr>
-          <p:cNvSpPr txBox="1"/>
-          <p:nvPr/>
-        </p:nvSpPr>
-        <p:spPr>
-          <a:xfrm>
-            <a:off x="6230368" y="5737130"/>
-            <a:ext cx="5510893" cy="646331"/>
-          </a:xfrm>
-          <a:prstGeom prst="rect">
-            <a:avLst/>
-          </a:prstGeom>
-          <a:noFill/>
-        </p:spPr>
-        <p:txBody>
-          <a:bodyPr wrap="square" rtlCol="0">
-            <a:spAutoFit/>
-          </a:bodyPr>
-          <a:lstStyle/>
-          <a:p>
-            <a:r>
-              <a:rPr lang="en-US" altLang="ko-KR" dirty="0"/>
-              <a:t>-</a:t>
-            </a:r>
-            <a:r>
-              <a:rPr lang="ko-KR" altLang="en-US" dirty="0"/>
-              <a:t>가지 않은 방이 </a:t>
-            </a:r>
-            <a:r>
-              <a:rPr lang="ko-KR" altLang="en-US" dirty="0" err="1"/>
-              <a:t>잠겨있다고</a:t>
-            </a:r>
-            <a:r>
-              <a:rPr lang="ko-KR" altLang="en-US" dirty="0"/>
-              <a:t> 보여주는 자물쇠 레퍼런스 </a:t>
-            </a:r>
-            <a:r>
-              <a:rPr lang="en-US" altLang="ko-KR" dirty="0"/>
-              <a:t>(</a:t>
-            </a:r>
-            <a:r>
-              <a:rPr lang="ko-KR" altLang="en-US" dirty="0"/>
-              <a:t>위는 예시</a:t>
-            </a:r>
-            <a:r>
-              <a:rPr lang="en-US" altLang="ko-KR" dirty="0"/>
-              <a:t>)</a:t>
-            </a:r>
-          </a:p>
-        </p:txBody>
-      </p:sp>
-      <p:pic>
-        <p:nvPicPr>
-          <p:cNvPr id="5" name="그림 4">
-            <a:extLst>
-              <a:ext uri="{FF2B5EF4-FFF2-40B4-BE49-F238E27FC236}">
-                <a16:creationId xmlns:a16="http://schemas.microsoft.com/office/drawing/2014/main" id="{3AAE7310-3284-461B-807E-42DCAADC853A}"/>
-              </a:ext>
-            </a:extLst>
-          </p:cNvPr>
-          <p:cNvPicPr>
-            <a:picLocks noChangeAspect="1"/>
-          </p:cNvPicPr>
-          <p:nvPr/>
-        </p:nvPicPr>
-        <p:blipFill>
-          <a:blip r:embed="rId2"/>
-          <a:stretch>
-            <a:fillRect/>
-          </a:stretch>
-        </p:blipFill>
-        <p:spPr>
-          <a:xfrm>
-            <a:off x="616746" y="1825626"/>
-            <a:ext cx="1755776" cy="1728608"/>
-          </a:xfrm>
-          <a:prstGeom prst="rect">
-            <a:avLst/>
-          </a:prstGeom>
-        </p:spPr>
-      </p:pic>
-      <p:sp>
-        <p:nvSpPr>
-          <p:cNvPr id="7" name="TextBox 6">
-            <a:extLst>
-              <a:ext uri="{FF2B5EF4-FFF2-40B4-BE49-F238E27FC236}">
-                <a16:creationId xmlns:a16="http://schemas.microsoft.com/office/drawing/2014/main" id="{42897491-F8E0-48DD-BCF5-498E1F50C202}"/>
-              </a:ext>
-            </a:extLst>
-          </p:cNvPr>
-          <p:cNvSpPr txBox="1"/>
-          <p:nvPr/>
-        </p:nvSpPr>
-        <p:spPr>
-          <a:xfrm>
-            <a:off x="2647784" y="1979875"/>
-            <a:ext cx="1836752" cy="369332"/>
-          </a:xfrm>
-          <a:prstGeom prst="rect">
-            <a:avLst/>
-          </a:prstGeom>
-          <a:noFill/>
-        </p:spPr>
-        <p:txBody>
-          <a:bodyPr wrap="square" rtlCol="0">
-            <a:spAutoFit/>
-          </a:bodyPr>
-          <a:lstStyle/>
-          <a:p>
-            <a:r>
-              <a:rPr lang="ko-KR" altLang="en-US" dirty="0"/>
-              <a:t>주방</a:t>
-            </a:r>
-          </a:p>
-        </p:txBody>
-      </p:sp>
-      <p:pic>
-        <p:nvPicPr>
-          <p:cNvPr id="8" name="그림 7">
-            <a:extLst>
-              <a:ext uri="{FF2B5EF4-FFF2-40B4-BE49-F238E27FC236}">
-                <a16:creationId xmlns:a16="http://schemas.microsoft.com/office/drawing/2014/main" id="{84409D39-CC68-4E8A-AD8F-617842CF7D2D}"/>
-              </a:ext>
-            </a:extLst>
-          </p:cNvPr>
-          <p:cNvPicPr>
-            <a:picLocks noChangeAspect="1"/>
-          </p:cNvPicPr>
-          <p:nvPr/>
-        </p:nvPicPr>
-        <p:blipFill>
-          <a:blip r:embed="rId3"/>
-          <a:stretch>
-            <a:fillRect/>
-          </a:stretch>
-        </p:blipFill>
-        <p:spPr>
-          <a:xfrm>
-            <a:off x="4194621" y="1917000"/>
-            <a:ext cx="1802227" cy="1637234"/>
-          </a:xfrm>
-          <a:prstGeom prst="rect">
-            <a:avLst/>
-          </a:prstGeom>
-        </p:spPr>
-      </p:pic>
-      <p:sp>
-        <p:nvSpPr>
-          <p:cNvPr id="9" name="TextBox 8">
-            <a:extLst>
-              <a:ext uri="{FF2B5EF4-FFF2-40B4-BE49-F238E27FC236}">
-                <a16:creationId xmlns:a16="http://schemas.microsoft.com/office/drawing/2014/main" id="{0FE8C19D-99F2-4FC6-AD5D-138697A9DD96}"/>
-              </a:ext>
-            </a:extLst>
-          </p:cNvPr>
-          <p:cNvSpPr txBox="1"/>
-          <p:nvPr/>
-        </p:nvSpPr>
-        <p:spPr>
-          <a:xfrm>
-            <a:off x="6448508" y="1979875"/>
-            <a:ext cx="675862" cy="369332"/>
-          </a:xfrm>
-          <a:prstGeom prst="rect">
-            <a:avLst/>
-          </a:prstGeom>
-          <a:noFill/>
-        </p:spPr>
-        <p:txBody>
-          <a:bodyPr wrap="square" rtlCol="0">
-            <a:spAutoFit/>
-          </a:bodyPr>
-          <a:lstStyle/>
-          <a:p>
-            <a:r>
-              <a:rPr lang="ko-KR" altLang="en-US" dirty="0"/>
-              <a:t>서재</a:t>
-            </a:r>
-          </a:p>
-        </p:txBody>
-      </p:sp>
-      <p:pic>
-        <p:nvPicPr>
-          <p:cNvPr id="10" name="그림 9">
-            <a:extLst>
-              <a:ext uri="{FF2B5EF4-FFF2-40B4-BE49-F238E27FC236}">
-                <a16:creationId xmlns:a16="http://schemas.microsoft.com/office/drawing/2014/main" id="{88C9FBF4-0D85-4248-99FC-A2E378CC7D77}"/>
-              </a:ext>
-            </a:extLst>
-          </p:cNvPr>
-          <p:cNvPicPr>
-            <a:picLocks noChangeAspect="1"/>
-          </p:cNvPicPr>
-          <p:nvPr/>
-        </p:nvPicPr>
-        <p:blipFill>
-          <a:blip r:embed="rId4"/>
-          <a:stretch>
-            <a:fillRect/>
-          </a:stretch>
-        </p:blipFill>
-        <p:spPr>
-          <a:xfrm>
-            <a:off x="7675946" y="1825625"/>
-            <a:ext cx="1964735" cy="1946082"/>
-          </a:xfrm>
-          <a:prstGeom prst="rect">
-            <a:avLst/>
-          </a:prstGeom>
-        </p:spPr>
-      </p:pic>
-      <p:sp>
-        <p:nvSpPr>
-          <p:cNvPr id="11" name="TextBox 10">
-            <a:extLst>
-              <a:ext uri="{FF2B5EF4-FFF2-40B4-BE49-F238E27FC236}">
-                <a16:creationId xmlns:a16="http://schemas.microsoft.com/office/drawing/2014/main" id="{0306CC78-FF14-48B2-9C85-E783C1A3D9E5}"/>
-              </a:ext>
-            </a:extLst>
-          </p:cNvPr>
-          <p:cNvSpPr txBox="1"/>
-          <p:nvPr/>
-        </p:nvSpPr>
-        <p:spPr>
-          <a:xfrm>
-            <a:off x="9724445" y="1825625"/>
-            <a:ext cx="1280160" cy="369332"/>
-          </a:xfrm>
-          <a:prstGeom prst="rect">
-            <a:avLst/>
-          </a:prstGeom>
-          <a:noFill/>
-        </p:spPr>
-        <p:txBody>
-          <a:bodyPr wrap="square" rtlCol="0">
-            <a:spAutoFit/>
-          </a:bodyPr>
-          <a:lstStyle/>
-          <a:p>
-            <a:r>
-              <a:rPr lang="ko-KR" altLang="en-US"/>
-              <a:t>가정부 방</a:t>
-            </a:r>
-          </a:p>
-        </p:txBody>
-      </p:sp>
-    </p:spTree>
-    <p:extLst>
-      <p:ext uri="{BB962C8B-B14F-4D97-AF65-F5344CB8AC3E}">
-        <p14:creationId xmlns:p14="http://schemas.microsoft.com/office/powerpoint/2010/main" val="1926330292"/>
-      </p:ext>
-    </p:extLst>
-  </p:cSld>
-  <p:clrMapOvr>
-    <a:masterClrMapping/>
-  </p:clrMapOvr>
-</p:sld>
-</file>
-
-<file path=ppt/slides/slide11.xml><?xml version="1.0" encoding="utf-8"?>
-<p:sld xmlns:a="http://schemas.openxmlformats.org/drawingml/2006/main" xmlns:r="http://schemas.openxmlformats.org/officeDocument/2006/relationships" xmlns:p="http://schemas.openxmlformats.org/presentationml/2006/main">
-  <p:cSld>
-    <p:spTree>
-      <p:nvGrpSpPr>
-        <p:cNvPr id="1" name=""/>
-        <p:cNvGrpSpPr/>
-        <p:nvPr/>
-      </p:nvGrpSpPr>
-      <p:grpSpPr>
-        <a:xfrm>
-          <a:off x="0" y="0"/>
-          <a:ext cx="0" cy="0"/>
-          <a:chOff x="0" y="0"/>
-          <a:chExt cx="0" cy="0"/>
-        </a:xfrm>
-      </p:grpSpPr>
-      <p:sp>
-        <p:nvSpPr>
-          <p:cNvPr id="2" name="제목 1">
-            <a:extLst>
-              <a:ext uri="{FF2B5EF4-FFF2-40B4-BE49-F238E27FC236}">
                 <a16:creationId xmlns:a16="http://schemas.microsoft.com/office/drawing/2014/main" id="{F85E0F81-05E7-4E48-8D3F-783FC5C89271}"/>
               </a:ext>
             </a:extLst>
@@ -4127,7 +3759,7 @@
 </p:sld>
 </file>
 
-<file path=ppt/slides/slide12.xml><?xml version="1.0" encoding="utf-8"?>
+<file path=ppt/slides/slide11.xml><?xml version="1.0" encoding="utf-8"?>
 <p:sld xmlns:a="http://schemas.openxmlformats.org/drawingml/2006/main" xmlns:r="http://schemas.openxmlformats.org/officeDocument/2006/relationships" xmlns:p="http://schemas.openxmlformats.org/presentationml/2006/main">
   <p:cSld>
     <p:spTree>
@@ -4475,7 +4107,7 @@
 </p:sld>
 </file>
 
-<file path=ppt/slides/slide13.xml><?xml version="1.0" encoding="utf-8"?>
+<file path=ppt/slides/slide12.xml><?xml version="1.0" encoding="utf-8"?>
 <p:sld xmlns:a="http://schemas.openxmlformats.org/drawingml/2006/main" xmlns:r="http://schemas.openxmlformats.org/officeDocument/2006/relationships" xmlns:p="http://schemas.openxmlformats.org/presentationml/2006/main">
   <p:cSld>
     <p:spTree>
@@ -4827,7 +4459,7 @@
 </p:sld>
 </file>
 
-<file path=ppt/slides/slide14.xml><?xml version="1.0" encoding="utf-8"?>
+<file path=ppt/slides/slide13.xml><?xml version="1.0" encoding="utf-8"?>
 <p:sld xmlns:a="http://schemas.openxmlformats.org/drawingml/2006/main" xmlns:r="http://schemas.openxmlformats.org/officeDocument/2006/relationships" xmlns:p="http://schemas.openxmlformats.org/presentationml/2006/main">
   <p:cSld>
     <p:spTree>
@@ -5291,6 +4923,34 @@
             <a:pPr marL="0" indent="0">
               <a:buNone/>
             </a:pPr>
+            <a:endParaRPr lang="en-US" altLang="ko-KR" dirty="0"/>
+          </a:p>
+          <a:p>
+            <a:pPr marL="0" indent="0">
+              <a:buNone/>
+            </a:pPr>
+            <a:endParaRPr lang="en-US" altLang="ko-KR" dirty="0"/>
+          </a:p>
+          <a:p>
+            <a:pPr marL="0" indent="0">
+              <a:buNone/>
+            </a:pPr>
+            <a:r>
+              <a:rPr lang="ko-KR" altLang="en-US" dirty="0"/>
+              <a:t>다용도 실로 가는 문에 화살표 필요 문을 찾지 못하는 사람 많았음 </a:t>
+            </a:r>
+            <a:endParaRPr lang="en-US" altLang="ko-KR" dirty="0"/>
+          </a:p>
+          <a:p>
+            <a:pPr marL="0" indent="0">
+              <a:buNone/>
+            </a:pPr>
+            <a:endParaRPr lang="en-US" altLang="ko-KR" dirty="0"/>
+          </a:p>
+          <a:p>
+            <a:pPr marL="0" indent="0">
+              <a:buNone/>
+            </a:pPr>
             <a:endParaRPr lang="ko-KR" altLang="en-US" dirty="0"/>
           </a:p>
         </p:txBody>
@@ -5348,15 +5008,7 @@
           <a:p>
             <a:r>
               <a:rPr lang="ko-KR" altLang="en-US" dirty="0"/>
-              <a:t>플로우 </a:t>
-            </a:r>
-            <a:r>
-              <a:rPr lang="ko-KR" altLang="en-US" dirty="0" err="1"/>
-              <a:t>직관성</a:t>
-            </a:r>
-            <a:r>
-              <a:rPr lang="ko-KR" altLang="en-US" dirty="0"/>
-              <a:t> </a:t>
+              <a:t>맵 구현 방식</a:t>
             </a:r>
           </a:p>
         </p:txBody>
@@ -5377,17 +5029,15 @@
             <p:ph idx="1"/>
           </p:nvPr>
         </p:nvSpPr>
-        <p:spPr/>
+        <p:spPr>
+          <a:xfrm>
+            <a:off x="838200" y="1825625"/>
+            <a:ext cx="5170714" cy="4351338"/>
+          </a:xfrm>
+        </p:spPr>
         <p:txBody>
           <a:bodyPr/>
           <a:lstStyle/>
-          <a:p>
-            <a:r>
-              <a:rPr lang="ko-KR" altLang="en-US" dirty="0"/>
-              <a:t>다용도 실로 가는 문에 화살표 필요 문을 찾지 못하는 사람 많았음 </a:t>
-            </a:r>
-            <a:endParaRPr lang="en-US" altLang="ko-KR" dirty="0"/>
-          </a:p>
           <a:p>
             <a:endParaRPr lang="en-US" altLang="ko-KR" dirty="0"/>
           </a:p>
@@ -5411,13 +5061,331 @@
               <a:buNone/>
             </a:pPr>
             <a:endParaRPr lang="ko-KR" altLang="en-US" dirty="0"/>
+          </a:p>
+        </p:txBody>
+      </p:sp>
+      <p:pic>
+        <p:nvPicPr>
+          <p:cNvPr id="5" name="그림 4">
+            <a:extLst>
+              <a:ext uri="{FF2B5EF4-FFF2-40B4-BE49-F238E27FC236}">
+                <a16:creationId xmlns:a16="http://schemas.microsoft.com/office/drawing/2014/main" id="{15F81E36-45FA-455A-ACBF-33482CEFAEE3}"/>
+              </a:ext>
+            </a:extLst>
+          </p:cNvPr>
+          <p:cNvPicPr>
+            <a:picLocks noChangeAspect="1"/>
+          </p:cNvPicPr>
+          <p:nvPr/>
+        </p:nvPicPr>
+        <p:blipFill>
+          <a:blip r:embed="rId2">
+            <a:extLst>
+              <a:ext uri="{28A0092B-C50C-407E-A947-70E740481C1C}">
+                <a14:useLocalDpi xmlns:a14="http://schemas.microsoft.com/office/drawing/2010/main" val="0"/>
+              </a:ext>
+            </a:extLst>
+          </a:blip>
+          <a:stretch>
+            <a:fillRect/>
+          </a:stretch>
+        </p:blipFill>
+        <p:spPr>
+          <a:xfrm>
+            <a:off x="307520" y="2006405"/>
+            <a:ext cx="5448301" cy="3782074"/>
+          </a:xfrm>
+          <a:prstGeom prst="rect">
+            <a:avLst/>
+          </a:prstGeom>
+        </p:spPr>
+      </p:pic>
+      <p:sp>
+        <p:nvSpPr>
+          <p:cNvPr id="4" name="TextBox 3">
+            <a:extLst>
+              <a:ext uri="{FF2B5EF4-FFF2-40B4-BE49-F238E27FC236}">
+                <a16:creationId xmlns:a16="http://schemas.microsoft.com/office/drawing/2014/main" id="{584DBA01-033E-45CE-B7BE-9391F6274562}"/>
+              </a:ext>
+            </a:extLst>
+          </p:cNvPr>
+          <p:cNvSpPr txBox="1"/>
+          <p:nvPr/>
+        </p:nvSpPr>
+        <p:spPr>
+          <a:xfrm>
+            <a:off x="5143500" y="2006405"/>
+            <a:ext cx="5510893" cy="3970318"/>
+          </a:xfrm>
+          <a:prstGeom prst="rect">
+            <a:avLst/>
+          </a:prstGeom>
+          <a:noFill/>
+        </p:spPr>
+        <p:txBody>
+          <a:bodyPr wrap="square" rtlCol="0">
+            <a:spAutoFit/>
+          </a:bodyPr>
+          <a:lstStyle/>
+          <a:p>
+            <a:r>
+              <a:rPr lang="en-US" altLang="ko-KR" dirty="0"/>
+              <a:t>-</a:t>
+            </a:r>
+            <a:r>
+              <a:rPr lang="ko-KR" altLang="en-US" dirty="0"/>
+              <a:t>화살표를 누르면 </a:t>
+            </a:r>
+            <a:r>
+              <a:rPr lang="en-US" altLang="ko-KR" dirty="0"/>
+              <a:t>1</a:t>
+            </a:r>
+            <a:r>
+              <a:rPr lang="ko-KR" altLang="en-US" dirty="0"/>
+              <a:t>층 </a:t>
+            </a:r>
+            <a:r>
+              <a:rPr lang="ko-KR" altLang="en-US" dirty="0" err="1"/>
+              <a:t>맵과</a:t>
+            </a:r>
+            <a:r>
+              <a:rPr lang="ko-KR" altLang="en-US" dirty="0"/>
+              <a:t> </a:t>
+            </a:r>
+            <a:r>
+              <a:rPr lang="en-US" altLang="ko-KR" dirty="0"/>
+              <a:t>2</a:t>
+            </a:r>
+            <a:r>
+              <a:rPr lang="ko-KR" altLang="en-US" dirty="0"/>
+              <a:t>층 </a:t>
+            </a:r>
+            <a:r>
+              <a:rPr lang="ko-KR" altLang="en-US" dirty="0" err="1"/>
+              <a:t>맵을</a:t>
+            </a:r>
+            <a:r>
+              <a:rPr lang="ko-KR" altLang="en-US" dirty="0"/>
+              <a:t> 바꿔서 출력</a:t>
+            </a:r>
+            <a:endParaRPr lang="en-US" altLang="ko-KR" dirty="0"/>
+          </a:p>
+          <a:p>
+            <a:endParaRPr lang="en-US" altLang="ko-KR" dirty="0"/>
+          </a:p>
+          <a:p>
+            <a:r>
+              <a:rPr lang="en-US" altLang="ko-KR" dirty="0"/>
+              <a:t>-</a:t>
+            </a:r>
+            <a:r>
+              <a:rPr lang="ko-KR" altLang="en-US" dirty="0"/>
+              <a:t>아직 가지 않았거나 문을 열지 않았다면 잠금 장치를 건 것 처럼 만들기</a:t>
+            </a:r>
+            <a:r>
+              <a:rPr lang="en-US" altLang="ko-KR" dirty="0"/>
+              <a:t> + </a:t>
+            </a:r>
+            <a:r>
+              <a:rPr lang="ko-KR" altLang="en-US" dirty="0"/>
+              <a:t>클릭 처리 </a:t>
+            </a:r>
+            <a:r>
+              <a:rPr lang="en-US" altLang="ko-KR" dirty="0"/>
+              <a:t>OFF</a:t>
+            </a:r>
+          </a:p>
+          <a:p>
+            <a:endParaRPr lang="en-US" altLang="ko-KR" dirty="0"/>
+          </a:p>
+          <a:p>
+            <a:r>
+              <a:rPr lang="en-US" altLang="ko-KR" dirty="0"/>
+              <a:t>-</a:t>
+            </a:r>
+            <a:r>
+              <a:rPr lang="ko-KR" altLang="en-US" dirty="0"/>
+              <a:t>그 방에서 찾지 못한 물건이 있거나 상호작용 하지 않은 물건이 있다면 아이템에 </a:t>
+            </a:r>
+            <a:r>
+              <a:rPr lang="ko-KR" altLang="en-US" dirty="0" err="1"/>
+              <a:t>붙여둔</a:t>
+            </a:r>
+            <a:r>
+              <a:rPr lang="ko-KR" altLang="en-US" dirty="0"/>
+              <a:t> 것처럼 </a:t>
+            </a:r>
+            <a:r>
+              <a:rPr lang="ko-KR" altLang="en-US" dirty="0" err="1"/>
+              <a:t>별모양</a:t>
+            </a:r>
+            <a:r>
+              <a:rPr lang="ko-KR" altLang="en-US" dirty="0"/>
+              <a:t> </a:t>
+            </a:r>
+            <a:r>
+              <a:rPr lang="ko-KR" altLang="en-US" dirty="0" err="1"/>
+              <a:t>붙여두기</a:t>
+            </a:r>
+            <a:endParaRPr lang="en-US" altLang="ko-KR" dirty="0"/>
+          </a:p>
+          <a:p>
+            <a:endParaRPr lang="en-US" altLang="ko-KR" dirty="0"/>
+          </a:p>
+          <a:p>
+            <a:r>
+              <a:rPr lang="en-US" altLang="ko-KR" dirty="0"/>
+              <a:t>-</a:t>
+            </a:r>
+            <a:r>
+              <a:rPr lang="ko-KR" altLang="en-US" dirty="0"/>
+              <a:t>한 번 간 방은 </a:t>
+            </a:r>
+            <a:r>
+              <a:rPr lang="ko-KR" altLang="en-US" dirty="0" err="1"/>
+              <a:t>맵에서</a:t>
+            </a:r>
+            <a:r>
+              <a:rPr lang="ko-KR" altLang="en-US" dirty="0"/>
+              <a:t> 클릭 했을 경우 바로 갈 수 있도록 한다</a:t>
+            </a:r>
+            <a:r>
+              <a:rPr lang="en-US" altLang="ko-KR" dirty="0"/>
+              <a:t>. </a:t>
+            </a:r>
+          </a:p>
+          <a:p>
+            <a:pPr marL="285750" indent="-285750">
+              <a:buFontTx/>
+              <a:buChar char="-"/>
+            </a:pPr>
+            <a:endParaRPr lang="en-US" altLang="ko-KR" dirty="0"/>
+          </a:p>
+          <a:p>
+            <a:r>
+              <a:rPr lang="en-US" altLang="ko-KR" dirty="0"/>
+              <a:t>-</a:t>
+            </a:r>
+            <a:r>
+              <a:rPr lang="ko-KR" altLang="en-US" dirty="0"/>
+              <a:t>기본적으로 </a:t>
+            </a:r>
+            <a:r>
+              <a:rPr lang="ko-KR" altLang="en-US" dirty="0" err="1"/>
+              <a:t>맵은</a:t>
+            </a:r>
+            <a:r>
+              <a:rPr lang="ko-KR" altLang="en-US" dirty="0"/>
+              <a:t> 키보드 </a:t>
+            </a:r>
+            <a:r>
+              <a:rPr lang="en-US" altLang="ko-KR" dirty="0"/>
+              <a:t>M</a:t>
+            </a:r>
+            <a:r>
+              <a:rPr lang="ko-KR" altLang="en-US" dirty="0"/>
+              <a:t>을 눌렀을 경우 켜지도록</a:t>
+            </a:r>
+            <a:endParaRPr lang="en-US" altLang="ko-KR" dirty="0"/>
+          </a:p>
+        </p:txBody>
+      </p:sp>
+      <p:sp>
+        <p:nvSpPr>
+          <p:cNvPr id="6" name="이등변 삼각형 5">
+            <a:extLst>
+              <a:ext uri="{FF2B5EF4-FFF2-40B4-BE49-F238E27FC236}">
+                <a16:creationId xmlns:a16="http://schemas.microsoft.com/office/drawing/2014/main" id="{DA75EE90-512C-4AED-A73C-1FF92C62B7D2}"/>
+              </a:ext>
+            </a:extLst>
+          </p:cNvPr>
+          <p:cNvSpPr/>
+          <p:nvPr/>
+        </p:nvSpPr>
+        <p:spPr>
+          <a:xfrm>
+            <a:off x="1097280" y="2194560"/>
+            <a:ext cx="135172" cy="127221"/>
+          </a:xfrm>
+          <a:prstGeom prst="triangle">
+            <a:avLst/>
+          </a:prstGeom>
+        </p:spPr>
+        <p:style>
+          <a:lnRef idx="2">
+            <a:schemeClr val="accent1">
+              <a:shade val="50000"/>
+            </a:schemeClr>
+          </a:lnRef>
+          <a:fillRef idx="1">
+            <a:schemeClr val="accent1"/>
+          </a:fillRef>
+          <a:effectRef idx="0">
+            <a:schemeClr val="accent1"/>
+          </a:effectRef>
+          <a:fontRef idx="minor">
+            <a:schemeClr val="lt1"/>
+          </a:fontRef>
+        </p:style>
+        <p:txBody>
+          <a:bodyPr rtlCol="0" anchor="ctr"/>
+          <a:lstStyle/>
+          <a:p>
+            <a:pPr algn="ctr"/>
+            <a:endParaRPr lang="ko-KR" altLang="en-US"/>
+          </a:p>
+        </p:txBody>
+      </p:sp>
+      <p:sp>
+        <p:nvSpPr>
+          <p:cNvPr id="8" name="이등변 삼각형 7">
+            <a:extLst>
+              <a:ext uri="{FF2B5EF4-FFF2-40B4-BE49-F238E27FC236}">
+                <a16:creationId xmlns:a16="http://schemas.microsoft.com/office/drawing/2014/main" id="{9ABEF7F2-2D4E-48F0-9947-A918F85FD130}"/>
+              </a:ext>
+            </a:extLst>
+          </p:cNvPr>
+          <p:cNvSpPr/>
+          <p:nvPr/>
+        </p:nvSpPr>
+        <p:spPr>
+          <a:xfrm rot="10800000">
+            <a:off x="1097280" y="2388801"/>
+            <a:ext cx="135172" cy="127221"/>
+          </a:xfrm>
+          <a:prstGeom prst="triangle">
+            <a:avLst/>
+          </a:prstGeom>
+        </p:spPr>
+        <p:style>
+          <a:lnRef idx="2">
+            <a:schemeClr val="accent1">
+              <a:shade val="50000"/>
+            </a:schemeClr>
+          </a:lnRef>
+          <a:fillRef idx="1">
+            <a:schemeClr val="accent1"/>
+          </a:fillRef>
+          <a:effectRef idx="0">
+            <a:schemeClr val="accent1"/>
+          </a:effectRef>
+          <a:fontRef idx="minor">
+            <a:schemeClr val="lt1"/>
+          </a:fontRef>
+        </p:style>
+        <p:txBody>
+          <a:bodyPr rtlCol="0" anchor="ctr"/>
+          <a:lstStyle/>
+          <a:p>
+            <a:pPr algn="ctr"/>
+            <a:endParaRPr lang="ko-KR" altLang="en-US"/>
           </a:p>
         </p:txBody>
       </p:sp>
     </p:spTree>
     <p:extLst>
       <p:ext uri="{BB962C8B-B14F-4D97-AF65-F5344CB8AC3E}">
-        <p14:creationId xmlns:p14="http://schemas.microsoft.com/office/powerpoint/2010/main" val="2169621958"/>
+        <p14:creationId xmlns:p14="http://schemas.microsoft.com/office/powerpoint/2010/main" val="3553317461"/>
       </p:ext>
     </p:extLst>
   </p:cSld>
@@ -5574,7 +5542,7 @@
         <p:spPr>
           <a:xfrm>
             <a:off x="5143500" y="2006405"/>
-            <a:ext cx="5510893" cy="3970318"/>
+            <a:ext cx="5510893" cy="646331"/>
           </a:xfrm>
           <a:prstGeom prst="rect">
             <a:avLst/>
@@ -5592,158 +5560,12 @@
               <a:t>-</a:t>
             </a:r>
             <a:r>
-              <a:rPr lang="ko-KR" altLang="en-US" dirty="0"/>
-              <a:t>화살표를 누르면 </a:t>
-            </a:r>
-            <a:r>
-              <a:rPr lang="en-US" altLang="ko-KR" dirty="0"/>
-              <a:t>1</a:t>
-            </a:r>
-            <a:r>
-              <a:rPr lang="ko-KR" altLang="en-US" dirty="0"/>
-              <a:t>층 </a:t>
-            </a:r>
-            <a:r>
               <a:rPr lang="ko-KR" altLang="en-US" dirty="0" err="1"/>
-              <a:t>맵과</a:t>
-            </a:r>
-            <a:r>
-              <a:rPr lang="ko-KR" altLang="en-US" dirty="0"/>
-              <a:t> </a:t>
-            </a:r>
-            <a:r>
-              <a:rPr lang="en-US" altLang="ko-KR" dirty="0"/>
-              <a:t>2</a:t>
-            </a:r>
-            <a:r>
-              <a:rPr lang="ko-KR" altLang="en-US" dirty="0"/>
-              <a:t>층 </a:t>
-            </a:r>
-            <a:r>
-              <a:rPr lang="ko-KR" altLang="en-US" dirty="0" err="1"/>
-              <a:t>맵을</a:t>
-            </a:r>
-            <a:r>
-              <a:rPr lang="ko-KR" altLang="en-US" dirty="0"/>
-              <a:t> 바꿔서 출력</a:t>
-            </a:r>
-            <a:endParaRPr lang="en-US" altLang="ko-KR" dirty="0"/>
-          </a:p>
-          <a:p>
-            <a:endParaRPr lang="en-US" altLang="ko-KR" dirty="0"/>
-          </a:p>
-          <a:p>
-            <a:r>
-              <a:rPr lang="en-US" altLang="ko-KR" dirty="0"/>
-              <a:t>-</a:t>
-            </a:r>
-            <a:r>
-              <a:rPr lang="ko-KR" altLang="en-US" dirty="0"/>
-              <a:t>아직 가지 않았거나 문을 열지 않았다면 잠금 장치를 건 것 처럼 만들기</a:t>
-            </a:r>
-            <a:r>
-              <a:rPr lang="en-US" altLang="ko-KR" dirty="0"/>
-              <a:t> + </a:t>
-            </a:r>
-            <a:r>
-              <a:rPr lang="ko-KR" altLang="en-US" dirty="0"/>
-              <a:t>클릭 처리 </a:t>
-            </a:r>
-            <a:r>
-              <a:rPr lang="en-US" altLang="ko-KR" dirty="0"/>
-              <a:t>OFF</a:t>
-            </a:r>
-          </a:p>
-          <a:p>
-            <a:endParaRPr lang="en-US" altLang="ko-KR" dirty="0"/>
-          </a:p>
-          <a:p>
-            <a:r>
-              <a:rPr lang="en-US" altLang="ko-KR" dirty="0"/>
-              <a:t>-</a:t>
-            </a:r>
-            <a:r>
-              <a:rPr lang="ko-KR" altLang="en-US" dirty="0"/>
-              <a:t>그 방에서 찾지 못한 물건이 있거나 상호작용 하지 않은 물건이 있다면 아이템에 </a:t>
-            </a:r>
-            <a:r>
-              <a:rPr lang="ko-KR" altLang="en-US" dirty="0" err="1"/>
-              <a:t>붙여둔</a:t>
-            </a:r>
-            <a:r>
-              <a:rPr lang="ko-KR" altLang="en-US" dirty="0"/>
-              <a:t> 것처럼 </a:t>
-            </a:r>
-            <a:r>
-              <a:rPr lang="ko-KR" altLang="en-US" dirty="0" err="1"/>
-              <a:t>별모양</a:t>
-            </a:r>
-            <a:r>
-              <a:rPr lang="ko-KR" altLang="en-US" dirty="0"/>
-              <a:t> </a:t>
-            </a:r>
-            <a:r>
-              <a:rPr lang="ko-KR" altLang="en-US" dirty="0" err="1"/>
-              <a:t>붙여두기</a:t>
-            </a:r>
-            <a:endParaRPr lang="en-US" altLang="ko-KR" dirty="0"/>
-          </a:p>
-          <a:p>
-            <a:endParaRPr lang="en-US" altLang="ko-KR" dirty="0"/>
-          </a:p>
-          <a:p>
-            <a:r>
-              <a:rPr lang="en-US" altLang="ko-KR" dirty="0"/>
-              <a:t>-</a:t>
-            </a:r>
-            <a:r>
-              <a:rPr lang="ko-KR" altLang="en-US" dirty="0"/>
-              <a:t>한 번 간 방은 </a:t>
-            </a:r>
-            <a:r>
-              <a:rPr lang="ko-KR" altLang="en-US" dirty="0" err="1"/>
-              <a:t>맵에서</a:t>
-            </a:r>
-            <a:r>
-              <a:rPr lang="ko-KR" altLang="en-US" dirty="0"/>
-              <a:t> 클릭 했을 경우 바로 갈 수 있도록 한다</a:t>
-            </a:r>
-            <a:r>
-              <a:rPr lang="en-US" altLang="ko-KR" dirty="0"/>
-              <a:t>. </a:t>
-            </a:r>
-          </a:p>
-          <a:p>
-            <a:pPr marL="285750" indent="-285750">
-              <a:buFontTx/>
-              <a:buChar char="-"/>
-            </a:pPr>
-            <a:endParaRPr lang="en-US" altLang="ko-KR" dirty="0"/>
-          </a:p>
-          <a:p>
-            <a:r>
-              <a:rPr lang="en-US" altLang="ko-KR" dirty="0"/>
-              <a:t>-</a:t>
-            </a:r>
-            <a:r>
-              <a:rPr lang="ko-KR" altLang="en-US" dirty="0"/>
-              <a:t>기본적으로 </a:t>
-            </a:r>
-            <a:r>
-              <a:rPr lang="ko-KR" altLang="en-US" dirty="0" err="1"/>
-              <a:t>맵은</a:t>
-            </a:r>
-            <a:r>
-              <a:rPr lang="ko-KR" altLang="en-US" dirty="0"/>
-              <a:t> 키보드 </a:t>
-            </a:r>
-            <a:r>
-              <a:rPr lang="en-US" altLang="ko-KR" dirty="0"/>
-              <a:t>M</a:t>
-            </a:r>
-            <a:r>
-              <a:rPr lang="ko-KR" altLang="en-US" dirty="0"/>
-              <a:t>을 눌렀을 경우 켜지도록</a:t>
+              <a:t>에셋이</a:t>
+            </a:r>
+            <a:r>
+              <a:rPr lang="ko-KR" altLang="en-US" dirty="0"/>
+              <a:t> 만들어지기 전 까지는 빈 박스 안에 텍스트 박스 넣어서 방 이름 넣어야 함 </a:t>
             </a:r>
             <a:endParaRPr lang="en-US" altLang="ko-KR" dirty="0"/>
           </a:p>
@@ -5844,7 +5666,7 @@
     </p:spTree>
     <p:extLst>
       <p:ext uri="{BB962C8B-B14F-4D97-AF65-F5344CB8AC3E}">
-        <p14:creationId xmlns:p14="http://schemas.microsoft.com/office/powerpoint/2010/main" val="3553317461"/>
+        <p14:creationId xmlns:p14="http://schemas.microsoft.com/office/powerpoint/2010/main" val="1985532294"/>
       </p:ext>
     </p:extLst>
   </p:cSld>
@@ -5855,287 +5677,6 @@
 </file>
 
 <file path=ppt/slides/slide6.xml><?xml version="1.0" encoding="utf-8"?>
-<p:sld xmlns:a="http://schemas.openxmlformats.org/drawingml/2006/main" xmlns:r="http://schemas.openxmlformats.org/officeDocument/2006/relationships" xmlns:p="http://schemas.openxmlformats.org/presentationml/2006/main">
-  <p:cSld>
-    <p:spTree>
-      <p:nvGrpSpPr>
-        <p:cNvPr id="1" name=""/>
-        <p:cNvGrpSpPr/>
-        <p:nvPr/>
-      </p:nvGrpSpPr>
-      <p:grpSpPr>
-        <a:xfrm>
-          <a:off x="0" y="0"/>
-          <a:ext cx="0" cy="0"/>
-          <a:chOff x="0" y="0"/>
-          <a:chExt cx="0" cy="0"/>
-        </a:xfrm>
-      </p:grpSpPr>
-      <p:sp>
-        <p:nvSpPr>
-          <p:cNvPr id="2" name="제목 1">
-            <a:extLst>
-              <a:ext uri="{FF2B5EF4-FFF2-40B4-BE49-F238E27FC236}">
-                <a16:creationId xmlns:a16="http://schemas.microsoft.com/office/drawing/2014/main" id="{C2C5EB99-E3DA-46BF-9406-BE4AC1C48AA5}"/>
-              </a:ext>
-            </a:extLst>
-          </p:cNvPr>
-          <p:cNvSpPr>
-            <a:spLocks noGrp="1"/>
-          </p:cNvSpPr>
-          <p:nvPr>
-            <p:ph type="title"/>
-          </p:nvPr>
-        </p:nvSpPr>
-        <p:spPr/>
-        <p:txBody>
-          <a:bodyPr/>
-          <a:lstStyle/>
-          <a:p>
-            <a:r>
-              <a:rPr lang="ko-KR" altLang="en-US" dirty="0"/>
-              <a:t>맵 구현 방식</a:t>
-            </a:r>
-          </a:p>
-        </p:txBody>
-      </p:sp>
-      <p:sp>
-        <p:nvSpPr>
-          <p:cNvPr id="3" name="내용 개체 틀 2">
-            <a:extLst>
-              <a:ext uri="{FF2B5EF4-FFF2-40B4-BE49-F238E27FC236}">
-                <a16:creationId xmlns:a16="http://schemas.microsoft.com/office/drawing/2014/main" id="{BE8EB9C6-F307-41B3-9AF2-5A062E3A3E48}"/>
-              </a:ext>
-            </a:extLst>
-          </p:cNvPr>
-          <p:cNvSpPr>
-            <a:spLocks noGrp="1"/>
-          </p:cNvSpPr>
-          <p:nvPr>
-            <p:ph idx="1"/>
-          </p:nvPr>
-        </p:nvSpPr>
-        <p:spPr>
-          <a:xfrm>
-            <a:off x="838200" y="1825625"/>
-            <a:ext cx="5170714" cy="4351338"/>
-          </a:xfrm>
-        </p:spPr>
-        <p:txBody>
-          <a:bodyPr/>
-          <a:lstStyle/>
-          <a:p>
-            <a:endParaRPr lang="en-US" altLang="ko-KR" dirty="0"/>
-          </a:p>
-          <a:p>
-            <a:pPr marL="0" indent="0">
-              <a:buNone/>
-            </a:pPr>
-            <a:endParaRPr lang="en-US" altLang="ko-KR" dirty="0"/>
-          </a:p>
-          <a:p>
-            <a:endParaRPr lang="en-US" altLang="ko-KR" dirty="0"/>
-          </a:p>
-          <a:p>
-            <a:pPr marL="0" indent="0">
-              <a:buNone/>
-            </a:pPr>
-            <a:endParaRPr lang="en-US" altLang="ko-KR" dirty="0"/>
-          </a:p>
-          <a:p>
-            <a:pPr marL="0" indent="0">
-              <a:buNone/>
-            </a:pPr>
-            <a:endParaRPr lang="ko-KR" altLang="en-US" dirty="0"/>
-          </a:p>
-        </p:txBody>
-      </p:sp>
-      <p:pic>
-        <p:nvPicPr>
-          <p:cNvPr id="5" name="그림 4">
-            <a:extLst>
-              <a:ext uri="{FF2B5EF4-FFF2-40B4-BE49-F238E27FC236}">
-                <a16:creationId xmlns:a16="http://schemas.microsoft.com/office/drawing/2014/main" id="{15F81E36-45FA-455A-ACBF-33482CEFAEE3}"/>
-              </a:ext>
-            </a:extLst>
-          </p:cNvPr>
-          <p:cNvPicPr>
-            <a:picLocks noChangeAspect="1"/>
-          </p:cNvPicPr>
-          <p:nvPr/>
-        </p:nvPicPr>
-        <p:blipFill>
-          <a:blip r:embed="rId2">
-            <a:extLst>
-              <a:ext uri="{28A0092B-C50C-407E-A947-70E740481C1C}">
-                <a14:useLocalDpi xmlns:a14="http://schemas.microsoft.com/office/drawing/2010/main" val="0"/>
-              </a:ext>
-            </a:extLst>
-          </a:blip>
-          <a:stretch>
-            <a:fillRect/>
-          </a:stretch>
-        </p:blipFill>
-        <p:spPr>
-          <a:xfrm>
-            <a:off x="307520" y="2006405"/>
-            <a:ext cx="5448301" cy="3782074"/>
-          </a:xfrm>
-          <a:prstGeom prst="rect">
-            <a:avLst/>
-          </a:prstGeom>
-        </p:spPr>
-      </p:pic>
-      <p:sp>
-        <p:nvSpPr>
-          <p:cNvPr id="4" name="TextBox 3">
-            <a:extLst>
-              <a:ext uri="{FF2B5EF4-FFF2-40B4-BE49-F238E27FC236}">
-                <a16:creationId xmlns:a16="http://schemas.microsoft.com/office/drawing/2014/main" id="{584DBA01-033E-45CE-B7BE-9391F6274562}"/>
-              </a:ext>
-            </a:extLst>
-          </p:cNvPr>
-          <p:cNvSpPr txBox="1"/>
-          <p:nvPr/>
-        </p:nvSpPr>
-        <p:spPr>
-          <a:xfrm>
-            <a:off x="5143500" y="2006405"/>
-            <a:ext cx="5510893" cy="646331"/>
-          </a:xfrm>
-          <a:prstGeom prst="rect">
-            <a:avLst/>
-          </a:prstGeom>
-          <a:noFill/>
-        </p:spPr>
-        <p:txBody>
-          <a:bodyPr wrap="square" rtlCol="0">
-            <a:spAutoFit/>
-          </a:bodyPr>
-          <a:lstStyle/>
-          <a:p>
-            <a:r>
-              <a:rPr lang="en-US" altLang="ko-KR" dirty="0"/>
-              <a:t>-</a:t>
-            </a:r>
-            <a:r>
-              <a:rPr lang="ko-KR" altLang="en-US" dirty="0" err="1"/>
-              <a:t>에셋이</a:t>
-            </a:r>
-            <a:r>
-              <a:rPr lang="ko-KR" altLang="en-US" dirty="0"/>
-              <a:t> 만들어지기 전 까지는 빈 박스 안에 텍스트 박스 넣어서 방 이름 넣어야 함 </a:t>
-            </a:r>
-            <a:endParaRPr lang="en-US" altLang="ko-KR" dirty="0"/>
-          </a:p>
-        </p:txBody>
-      </p:sp>
-      <p:sp>
-        <p:nvSpPr>
-          <p:cNvPr id="6" name="이등변 삼각형 5">
-            <a:extLst>
-              <a:ext uri="{FF2B5EF4-FFF2-40B4-BE49-F238E27FC236}">
-                <a16:creationId xmlns:a16="http://schemas.microsoft.com/office/drawing/2014/main" id="{DA75EE90-512C-4AED-A73C-1FF92C62B7D2}"/>
-              </a:ext>
-            </a:extLst>
-          </p:cNvPr>
-          <p:cNvSpPr/>
-          <p:nvPr/>
-        </p:nvSpPr>
-        <p:spPr>
-          <a:xfrm>
-            <a:off x="1097280" y="2194560"/>
-            <a:ext cx="135172" cy="127221"/>
-          </a:xfrm>
-          <a:prstGeom prst="triangle">
-            <a:avLst/>
-          </a:prstGeom>
-        </p:spPr>
-        <p:style>
-          <a:lnRef idx="2">
-            <a:schemeClr val="accent1">
-              <a:shade val="50000"/>
-            </a:schemeClr>
-          </a:lnRef>
-          <a:fillRef idx="1">
-            <a:schemeClr val="accent1"/>
-          </a:fillRef>
-          <a:effectRef idx="0">
-            <a:schemeClr val="accent1"/>
-          </a:effectRef>
-          <a:fontRef idx="minor">
-            <a:schemeClr val="lt1"/>
-          </a:fontRef>
-        </p:style>
-        <p:txBody>
-          <a:bodyPr rtlCol="0" anchor="ctr"/>
-          <a:lstStyle/>
-          <a:p>
-            <a:pPr algn="ctr"/>
-            <a:endParaRPr lang="ko-KR" altLang="en-US"/>
-          </a:p>
-        </p:txBody>
-      </p:sp>
-      <p:sp>
-        <p:nvSpPr>
-          <p:cNvPr id="8" name="이등변 삼각형 7">
-            <a:extLst>
-              <a:ext uri="{FF2B5EF4-FFF2-40B4-BE49-F238E27FC236}">
-                <a16:creationId xmlns:a16="http://schemas.microsoft.com/office/drawing/2014/main" id="{9ABEF7F2-2D4E-48F0-9947-A918F85FD130}"/>
-              </a:ext>
-            </a:extLst>
-          </p:cNvPr>
-          <p:cNvSpPr/>
-          <p:nvPr/>
-        </p:nvSpPr>
-        <p:spPr>
-          <a:xfrm rot="10800000">
-            <a:off x="1097280" y="2388801"/>
-            <a:ext cx="135172" cy="127221"/>
-          </a:xfrm>
-          <a:prstGeom prst="triangle">
-            <a:avLst/>
-          </a:prstGeom>
-        </p:spPr>
-        <p:style>
-          <a:lnRef idx="2">
-            <a:schemeClr val="accent1">
-              <a:shade val="50000"/>
-            </a:schemeClr>
-          </a:lnRef>
-          <a:fillRef idx="1">
-            <a:schemeClr val="accent1"/>
-          </a:fillRef>
-          <a:effectRef idx="0">
-            <a:schemeClr val="accent1"/>
-          </a:effectRef>
-          <a:fontRef idx="minor">
-            <a:schemeClr val="lt1"/>
-          </a:fontRef>
-        </p:style>
-        <p:txBody>
-          <a:bodyPr rtlCol="0" anchor="ctr"/>
-          <a:lstStyle/>
-          <a:p>
-            <a:pPr algn="ctr"/>
-            <a:endParaRPr lang="ko-KR" altLang="en-US"/>
-          </a:p>
-        </p:txBody>
-      </p:sp>
-    </p:spTree>
-    <p:extLst>
-      <p:ext uri="{BB962C8B-B14F-4D97-AF65-F5344CB8AC3E}">
-        <p14:creationId xmlns:p14="http://schemas.microsoft.com/office/powerpoint/2010/main" val="1985532294"/>
-      </p:ext>
-    </p:extLst>
-  </p:cSld>
-  <p:clrMapOvr>
-    <a:masterClrMapping/>
-  </p:clrMapOvr>
-</p:sld>
-</file>
-
-<file path=ppt/slides/slide7.xml><?xml version="1.0" encoding="utf-8"?>
 <p:sld xmlns:a="http://schemas.openxmlformats.org/drawingml/2006/main" xmlns:r="http://schemas.openxmlformats.org/officeDocument/2006/relationships" xmlns:p="http://schemas.openxmlformats.org/presentationml/2006/main">
   <p:cSld>
     <p:spTree>
@@ -6373,7 +5914,7 @@
 </p:sld>
 </file>
 
-<file path=ppt/slides/slide8.xml><?xml version="1.0" encoding="utf-8"?>
+<file path=ppt/slides/slide7.xml><?xml version="1.0" encoding="utf-8"?>
 <p:sld xmlns:a="http://schemas.openxmlformats.org/drawingml/2006/main" xmlns:r="http://schemas.openxmlformats.org/officeDocument/2006/relationships" xmlns:p="http://schemas.openxmlformats.org/presentationml/2006/main">
   <p:cSld>
     <p:spTree>
@@ -6641,7 +6182,7 @@
 </p:sld>
 </file>
 
-<file path=ppt/slides/slide9.xml><?xml version="1.0" encoding="utf-8"?>
+<file path=ppt/slides/slide8.xml><?xml version="1.0" encoding="utf-8"?>
 <p:sld xmlns:a="http://schemas.openxmlformats.org/drawingml/2006/main" xmlns:r="http://schemas.openxmlformats.org/officeDocument/2006/relationships" xmlns:p="http://schemas.openxmlformats.org/presentationml/2006/main">
   <p:cSld>
     <p:spTree>
@@ -6934,6 +6475,373 @@
     <p:extLst>
       <p:ext uri="{BB962C8B-B14F-4D97-AF65-F5344CB8AC3E}">
         <p14:creationId xmlns:p14="http://schemas.microsoft.com/office/powerpoint/2010/main" val="3144596664"/>
+      </p:ext>
+    </p:extLst>
+  </p:cSld>
+  <p:clrMapOvr>
+    <a:masterClrMapping/>
+  </p:clrMapOvr>
+</p:sld>
+</file>
+
+<file path=ppt/slides/slide9.xml><?xml version="1.0" encoding="utf-8"?>
+<p:sld xmlns:a="http://schemas.openxmlformats.org/drawingml/2006/main" xmlns:r="http://schemas.openxmlformats.org/officeDocument/2006/relationships" xmlns:p="http://schemas.openxmlformats.org/presentationml/2006/main">
+  <p:cSld>
+    <p:spTree>
+      <p:nvGrpSpPr>
+        <p:cNvPr id="1" name=""/>
+        <p:cNvGrpSpPr/>
+        <p:nvPr/>
+      </p:nvGrpSpPr>
+      <p:grpSpPr>
+        <a:xfrm>
+          <a:off x="0" y="0"/>
+          <a:ext cx="0" cy="0"/>
+          <a:chOff x="0" y="0"/>
+          <a:chExt cx="0" cy="0"/>
+        </a:xfrm>
+      </p:grpSpPr>
+      <p:sp>
+        <p:nvSpPr>
+          <p:cNvPr id="2" name="제목 1">
+            <a:extLst>
+              <a:ext uri="{FF2B5EF4-FFF2-40B4-BE49-F238E27FC236}">
+                <a16:creationId xmlns:a16="http://schemas.microsoft.com/office/drawing/2014/main" id="{C2C5EB99-E3DA-46BF-9406-BE4AC1C48AA5}"/>
+              </a:ext>
+            </a:extLst>
+          </p:cNvPr>
+          <p:cNvSpPr>
+            <a:spLocks noGrp="1"/>
+          </p:cNvSpPr>
+          <p:nvPr>
+            <p:ph type="title"/>
+          </p:nvPr>
+        </p:nvSpPr>
+        <p:spPr/>
+        <p:txBody>
+          <a:bodyPr/>
+          <a:lstStyle/>
+          <a:p>
+            <a:r>
+              <a:rPr lang="ko-KR" altLang="en-US" dirty="0" err="1"/>
+              <a:t>맵아트</a:t>
+            </a:r>
+            <a:r>
+              <a:rPr lang="ko-KR" altLang="en-US" dirty="0"/>
+              <a:t> 레퍼런스 </a:t>
+            </a:r>
+          </a:p>
+        </p:txBody>
+      </p:sp>
+      <p:sp>
+        <p:nvSpPr>
+          <p:cNvPr id="3" name="내용 개체 틀 2">
+            <a:extLst>
+              <a:ext uri="{FF2B5EF4-FFF2-40B4-BE49-F238E27FC236}">
+                <a16:creationId xmlns:a16="http://schemas.microsoft.com/office/drawing/2014/main" id="{BE8EB9C6-F307-41B3-9AF2-5A062E3A3E48}"/>
+              </a:ext>
+            </a:extLst>
+          </p:cNvPr>
+          <p:cNvSpPr>
+            <a:spLocks noGrp="1"/>
+          </p:cNvSpPr>
+          <p:nvPr>
+            <p:ph idx="1"/>
+          </p:nvPr>
+        </p:nvSpPr>
+        <p:spPr>
+          <a:xfrm>
+            <a:off x="838200" y="1825625"/>
+            <a:ext cx="5170714" cy="4351338"/>
+          </a:xfrm>
+        </p:spPr>
+        <p:txBody>
+          <a:bodyPr/>
+          <a:lstStyle/>
+          <a:p>
+            <a:endParaRPr lang="en-US" altLang="ko-KR" dirty="0"/>
+          </a:p>
+          <a:p>
+            <a:pPr marL="0" indent="0">
+              <a:buNone/>
+            </a:pPr>
+            <a:endParaRPr lang="en-US" altLang="ko-KR" dirty="0"/>
+          </a:p>
+          <a:p>
+            <a:endParaRPr lang="en-US" altLang="ko-KR" dirty="0"/>
+          </a:p>
+          <a:p>
+            <a:pPr marL="0" indent="0">
+              <a:buNone/>
+            </a:pPr>
+            <a:endParaRPr lang="en-US" altLang="ko-KR" dirty="0"/>
+          </a:p>
+          <a:p>
+            <a:pPr marL="0" indent="0">
+              <a:buNone/>
+            </a:pPr>
+            <a:endParaRPr lang="ko-KR" altLang="en-US" dirty="0"/>
+          </a:p>
+        </p:txBody>
+      </p:sp>
+      <p:sp>
+        <p:nvSpPr>
+          <p:cNvPr id="4" name="TextBox 3">
+            <a:extLst>
+              <a:ext uri="{FF2B5EF4-FFF2-40B4-BE49-F238E27FC236}">
+                <a16:creationId xmlns:a16="http://schemas.microsoft.com/office/drawing/2014/main" id="{584DBA01-033E-45CE-B7BE-9391F6274562}"/>
+              </a:ext>
+            </a:extLst>
+          </p:cNvPr>
+          <p:cNvSpPr txBox="1"/>
+          <p:nvPr/>
+        </p:nvSpPr>
+        <p:spPr>
+          <a:xfrm>
+            <a:off x="6230368" y="5737130"/>
+            <a:ext cx="5510893" cy="646331"/>
+          </a:xfrm>
+          <a:prstGeom prst="rect">
+            <a:avLst/>
+          </a:prstGeom>
+          <a:noFill/>
+        </p:spPr>
+        <p:txBody>
+          <a:bodyPr wrap="square" rtlCol="0">
+            <a:spAutoFit/>
+          </a:bodyPr>
+          <a:lstStyle/>
+          <a:p>
+            <a:r>
+              <a:rPr lang="en-US" altLang="ko-KR" dirty="0"/>
+              <a:t>-</a:t>
+            </a:r>
+            <a:r>
+              <a:rPr lang="ko-KR" altLang="en-US" dirty="0"/>
+              <a:t>가지 않은 방이 </a:t>
+            </a:r>
+            <a:r>
+              <a:rPr lang="ko-KR" altLang="en-US" dirty="0" err="1"/>
+              <a:t>잠겨있다고</a:t>
+            </a:r>
+            <a:r>
+              <a:rPr lang="ko-KR" altLang="en-US" dirty="0"/>
+              <a:t> 보여주는 자물쇠 레퍼런스 </a:t>
+            </a:r>
+            <a:r>
+              <a:rPr lang="en-US" altLang="ko-KR" dirty="0"/>
+              <a:t>(</a:t>
+            </a:r>
+            <a:r>
+              <a:rPr lang="ko-KR" altLang="en-US" dirty="0"/>
+              <a:t>위는 예시</a:t>
+            </a:r>
+            <a:r>
+              <a:rPr lang="en-US" altLang="ko-KR" dirty="0"/>
+              <a:t>)</a:t>
+            </a:r>
+          </a:p>
+        </p:txBody>
+      </p:sp>
+      <p:pic>
+        <p:nvPicPr>
+          <p:cNvPr id="5" name="그림 4">
+            <a:extLst>
+              <a:ext uri="{FF2B5EF4-FFF2-40B4-BE49-F238E27FC236}">
+                <a16:creationId xmlns:a16="http://schemas.microsoft.com/office/drawing/2014/main" id="{3AAE7310-3284-461B-807E-42DCAADC853A}"/>
+              </a:ext>
+            </a:extLst>
+          </p:cNvPr>
+          <p:cNvPicPr>
+            <a:picLocks noChangeAspect="1"/>
+          </p:cNvPicPr>
+          <p:nvPr/>
+        </p:nvPicPr>
+        <p:blipFill>
+          <a:blip r:embed="rId2"/>
+          <a:stretch>
+            <a:fillRect/>
+          </a:stretch>
+        </p:blipFill>
+        <p:spPr>
+          <a:xfrm>
+            <a:off x="616746" y="1825626"/>
+            <a:ext cx="1755776" cy="1728608"/>
+          </a:xfrm>
+          <a:prstGeom prst="rect">
+            <a:avLst/>
+          </a:prstGeom>
+        </p:spPr>
+      </p:pic>
+      <p:sp>
+        <p:nvSpPr>
+          <p:cNvPr id="7" name="TextBox 6">
+            <a:extLst>
+              <a:ext uri="{FF2B5EF4-FFF2-40B4-BE49-F238E27FC236}">
+                <a16:creationId xmlns:a16="http://schemas.microsoft.com/office/drawing/2014/main" id="{42897491-F8E0-48DD-BCF5-498E1F50C202}"/>
+              </a:ext>
+            </a:extLst>
+          </p:cNvPr>
+          <p:cNvSpPr txBox="1"/>
+          <p:nvPr/>
+        </p:nvSpPr>
+        <p:spPr>
+          <a:xfrm>
+            <a:off x="2647784" y="1979875"/>
+            <a:ext cx="1836752" cy="369332"/>
+          </a:xfrm>
+          <a:prstGeom prst="rect">
+            <a:avLst/>
+          </a:prstGeom>
+          <a:noFill/>
+        </p:spPr>
+        <p:txBody>
+          <a:bodyPr wrap="square" rtlCol="0">
+            <a:spAutoFit/>
+          </a:bodyPr>
+          <a:lstStyle/>
+          <a:p>
+            <a:r>
+              <a:rPr lang="ko-KR" altLang="en-US" dirty="0"/>
+              <a:t>주방</a:t>
+            </a:r>
+          </a:p>
+        </p:txBody>
+      </p:sp>
+      <p:pic>
+        <p:nvPicPr>
+          <p:cNvPr id="8" name="그림 7">
+            <a:extLst>
+              <a:ext uri="{FF2B5EF4-FFF2-40B4-BE49-F238E27FC236}">
+                <a16:creationId xmlns:a16="http://schemas.microsoft.com/office/drawing/2014/main" id="{84409D39-CC68-4E8A-AD8F-617842CF7D2D}"/>
+              </a:ext>
+            </a:extLst>
+          </p:cNvPr>
+          <p:cNvPicPr>
+            <a:picLocks noChangeAspect="1"/>
+          </p:cNvPicPr>
+          <p:nvPr/>
+        </p:nvPicPr>
+        <p:blipFill>
+          <a:blip r:embed="rId3"/>
+          <a:stretch>
+            <a:fillRect/>
+          </a:stretch>
+        </p:blipFill>
+        <p:spPr>
+          <a:xfrm>
+            <a:off x="4194621" y="1917000"/>
+            <a:ext cx="1802227" cy="1637234"/>
+          </a:xfrm>
+          <a:prstGeom prst="rect">
+            <a:avLst/>
+          </a:prstGeom>
+        </p:spPr>
+      </p:pic>
+      <p:sp>
+        <p:nvSpPr>
+          <p:cNvPr id="9" name="TextBox 8">
+            <a:extLst>
+              <a:ext uri="{FF2B5EF4-FFF2-40B4-BE49-F238E27FC236}">
+                <a16:creationId xmlns:a16="http://schemas.microsoft.com/office/drawing/2014/main" id="{0FE8C19D-99F2-4FC6-AD5D-138697A9DD96}"/>
+              </a:ext>
+            </a:extLst>
+          </p:cNvPr>
+          <p:cNvSpPr txBox="1"/>
+          <p:nvPr/>
+        </p:nvSpPr>
+        <p:spPr>
+          <a:xfrm>
+            <a:off x="6448508" y="1979875"/>
+            <a:ext cx="675862" cy="369332"/>
+          </a:xfrm>
+          <a:prstGeom prst="rect">
+            <a:avLst/>
+          </a:prstGeom>
+          <a:noFill/>
+        </p:spPr>
+        <p:txBody>
+          <a:bodyPr wrap="square" rtlCol="0">
+            <a:spAutoFit/>
+          </a:bodyPr>
+          <a:lstStyle/>
+          <a:p>
+            <a:r>
+              <a:rPr lang="ko-KR" altLang="en-US" dirty="0"/>
+              <a:t>서재</a:t>
+            </a:r>
+          </a:p>
+        </p:txBody>
+      </p:sp>
+      <p:pic>
+        <p:nvPicPr>
+          <p:cNvPr id="10" name="그림 9">
+            <a:extLst>
+              <a:ext uri="{FF2B5EF4-FFF2-40B4-BE49-F238E27FC236}">
+                <a16:creationId xmlns:a16="http://schemas.microsoft.com/office/drawing/2014/main" id="{88C9FBF4-0D85-4248-99FC-A2E378CC7D77}"/>
+              </a:ext>
+            </a:extLst>
+          </p:cNvPr>
+          <p:cNvPicPr>
+            <a:picLocks noChangeAspect="1"/>
+          </p:cNvPicPr>
+          <p:nvPr/>
+        </p:nvPicPr>
+        <p:blipFill>
+          <a:blip r:embed="rId4"/>
+          <a:stretch>
+            <a:fillRect/>
+          </a:stretch>
+        </p:blipFill>
+        <p:spPr>
+          <a:xfrm>
+            <a:off x="7675946" y="1825625"/>
+            <a:ext cx="1964735" cy="1946082"/>
+          </a:xfrm>
+          <a:prstGeom prst="rect">
+            <a:avLst/>
+          </a:prstGeom>
+        </p:spPr>
+      </p:pic>
+      <p:sp>
+        <p:nvSpPr>
+          <p:cNvPr id="11" name="TextBox 10">
+            <a:extLst>
+              <a:ext uri="{FF2B5EF4-FFF2-40B4-BE49-F238E27FC236}">
+                <a16:creationId xmlns:a16="http://schemas.microsoft.com/office/drawing/2014/main" id="{0306CC78-FF14-48B2-9C85-E783C1A3D9E5}"/>
+              </a:ext>
+            </a:extLst>
+          </p:cNvPr>
+          <p:cNvSpPr txBox="1"/>
+          <p:nvPr/>
+        </p:nvSpPr>
+        <p:spPr>
+          <a:xfrm>
+            <a:off x="9724445" y="1825625"/>
+            <a:ext cx="1280160" cy="369332"/>
+          </a:xfrm>
+          <a:prstGeom prst="rect">
+            <a:avLst/>
+          </a:prstGeom>
+          <a:noFill/>
+        </p:spPr>
+        <p:txBody>
+          <a:bodyPr wrap="square" rtlCol="0">
+            <a:spAutoFit/>
+          </a:bodyPr>
+          <a:lstStyle/>
+          <a:p>
+            <a:r>
+              <a:rPr lang="ko-KR" altLang="en-US"/>
+              <a:t>가정부 방</a:t>
+            </a:r>
+          </a:p>
+        </p:txBody>
+      </p:sp>
+    </p:spTree>
+    <p:extLst>
+      <p:ext uri="{BB962C8B-B14F-4D97-AF65-F5344CB8AC3E}">
+        <p14:creationId xmlns:p14="http://schemas.microsoft.com/office/powerpoint/2010/main" val="1926330292"/>
       </p:ext>
     </p:extLst>
   </p:cSld>
